--- a/reference_material/slides/020_Linear_Least_Squares.pptx
+++ b/reference_material/slides/020_Linear_Least_Squares.pptx
@@ -5,32 +5,45 @@
     <p:sldMasterId id="2147483660" r:id="rId1"/>
   </p:sldMasterIdLst>
   <p:notesMasterIdLst>
-    <p:notesMasterId r:id="rId25"/>
+    <p:notesMasterId r:id="rId38"/>
   </p:notesMasterIdLst>
   <p:sldIdLst>
     <p:sldId id="282" r:id="rId2"/>
     <p:sldId id="287" r:id="rId3"/>
     <p:sldId id="256" r:id="rId4"/>
-    <p:sldId id="257" r:id="rId5"/>
-    <p:sldId id="283" r:id="rId6"/>
-    <p:sldId id="259" r:id="rId7"/>
-    <p:sldId id="264" r:id="rId8"/>
-    <p:sldId id="273" r:id="rId9"/>
-    <p:sldId id="269" r:id="rId10"/>
-    <p:sldId id="272" r:id="rId11"/>
-    <p:sldId id="276" r:id="rId12"/>
-    <p:sldId id="274" r:id="rId13"/>
-    <p:sldId id="277" r:id="rId14"/>
-    <p:sldId id="284" r:id="rId15"/>
-    <p:sldId id="265" r:id="rId16"/>
-    <p:sldId id="286" r:id="rId17"/>
-    <p:sldId id="288" r:id="rId18"/>
-    <p:sldId id="275" r:id="rId19"/>
-    <p:sldId id="278" r:id="rId20"/>
-    <p:sldId id="279" r:id="rId21"/>
-    <p:sldId id="280" r:id="rId22"/>
-    <p:sldId id="285" r:id="rId23"/>
-    <p:sldId id="281" r:id="rId24"/>
+    <p:sldId id="289" r:id="rId5"/>
+    <p:sldId id="257" r:id="rId6"/>
+    <p:sldId id="283" r:id="rId7"/>
+    <p:sldId id="259" r:id="rId8"/>
+    <p:sldId id="264" r:id="rId9"/>
+    <p:sldId id="273" r:id="rId10"/>
+    <p:sldId id="269" r:id="rId11"/>
+    <p:sldId id="272" r:id="rId12"/>
+    <p:sldId id="276" r:id="rId13"/>
+    <p:sldId id="292" r:id="rId14"/>
+    <p:sldId id="290" r:id="rId15"/>
+    <p:sldId id="274" r:id="rId16"/>
+    <p:sldId id="293" r:id="rId17"/>
+    <p:sldId id="277" r:id="rId18"/>
+    <p:sldId id="284" r:id="rId19"/>
+    <p:sldId id="265" r:id="rId20"/>
+    <p:sldId id="286" r:id="rId21"/>
+    <p:sldId id="299" r:id="rId22"/>
+    <p:sldId id="291" r:id="rId23"/>
+    <p:sldId id="294" r:id="rId24"/>
+    <p:sldId id="288" r:id="rId25"/>
+    <p:sldId id="275" r:id="rId26"/>
+    <p:sldId id="278" r:id="rId27"/>
+    <p:sldId id="295" r:id="rId28"/>
+    <p:sldId id="296" r:id="rId29"/>
+    <p:sldId id="301" r:id="rId30"/>
+    <p:sldId id="297" r:id="rId31"/>
+    <p:sldId id="279" r:id="rId32"/>
+    <p:sldId id="280" r:id="rId33"/>
+    <p:sldId id="285" r:id="rId34"/>
+    <p:sldId id="298" r:id="rId35"/>
+    <p:sldId id="300" r:id="rId36"/>
+    <p:sldId id="281" r:id="rId37"/>
   </p:sldIdLst>
   <p:sldSz cx="12192000" cy="6858000"/>
   <p:notesSz cx="6858000" cy="9144000"/>
@@ -227,7 +240,7 @@
           <a:p>
             <a:fld id="{265333B3-BBF2-434F-9844-D2FF01DBD600}" type="datetimeFigureOut">
               <a:rPr lang="en-US" smtClean="0"/>
-              <a:t>11/13/25</a:t>
+              <a:t>10/26/26</a:t>
             </a:fld>
             <a:endParaRPr lang="en-US"/>
           </a:p>
@@ -1262,7 +1275,7 @@
           <a:p>
             <a:fld id="{43ED9329-DED2-9C4C-8B6A-8B4D879680E1}" type="datetimeFigureOut">
               <a:rPr lang="en-US" smtClean="0"/>
-              <a:t>11/13/25</a:t>
+              <a:t>10/26/26</a:t>
             </a:fld>
             <a:endParaRPr lang="en-US"/>
           </a:p>
@@ -1476,7 +1489,7 @@
           <a:p>
             <a:fld id="{43ED9329-DED2-9C4C-8B6A-8B4D879680E1}" type="datetimeFigureOut">
               <a:rPr lang="en-US" smtClean="0"/>
-              <a:t>11/13/25</a:t>
+              <a:t>10/26/26</a:t>
             </a:fld>
             <a:endParaRPr lang="en-US"/>
           </a:p>
@@ -1699,7 +1712,7 @@
           <a:p>
             <a:fld id="{43ED9329-DED2-9C4C-8B6A-8B4D879680E1}" type="datetimeFigureOut">
               <a:rPr lang="en-US" smtClean="0"/>
-              <a:t>11/13/25</a:t>
+              <a:t>10/26/26</a:t>
             </a:fld>
             <a:endParaRPr lang="en-US"/>
           </a:p>
@@ -2285,7 +2298,7 @@
           <a:p>
             <a:fld id="{43ED9329-DED2-9C4C-8B6A-8B4D879680E1}" type="datetimeFigureOut">
               <a:rPr lang="en-US" smtClean="0"/>
-              <a:t>11/13/25</a:t>
+              <a:t>10/26/26</a:t>
             </a:fld>
             <a:endParaRPr lang="en-US"/>
           </a:p>
@@ -2564,7 +2577,7 @@
           <a:p>
             <a:fld id="{43ED9329-DED2-9C4C-8B6A-8B4D879680E1}" type="datetimeFigureOut">
               <a:rPr lang="en-US" smtClean="0"/>
-              <a:t>11/13/25</a:t>
+              <a:t>10/26/26</a:t>
             </a:fld>
             <a:endParaRPr lang="en-US"/>
           </a:p>
@@ -2832,7 +2845,7 @@
           <a:p>
             <a:fld id="{43ED9329-DED2-9C4C-8B6A-8B4D879680E1}" type="datetimeFigureOut">
               <a:rPr lang="en-US" smtClean="0"/>
-              <a:t>11/13/25</a:t>
+              <a:t>10/26/26</a:t>
             </a:fld>
             <a:endParaRPr lang="en-US"/>
           </a:p>
@@ -3248,7 +3261,7 @@
           <a:p>
             <a:fld id="{43ED9329-DED2-9C4C-8B6A-8B4D879680E1}" type="datetimeFigureOut">
               <a:rPr lang="en-US" smtClean="0"/>
-              <a:t>11/13/25</a:t>
+              <a:t>10/26/26</a:t>
             </a:fld>
             <a:endParaRPr lang="en-US"/>
           </a:p>
@@ -3397,7 +3410,7 @@
           <a:p>
             <a:fld id="{43ED9329-DED2-9C4C-8B6A-8B4D879680E1}" type="datetimeFigureOut">
               <a:rPr lang="en-US" smtClean="0"/>
-              <a:t>11/13/25</a:t>
+              <a:t>10/26/26</a:t>
             </a:fld>
             <a:endParaRPr lang="en-US"/>
           </a:p>
@@ -3531,7 +3544,7 @@
           <a:p>
             <a:fld id="{43ED9329-DED2-9C4C-8B6A-8B4D879680E1}" type="datetimeFigureOut">
               <a:rPr lang="en-US" smtClean="0"/>
-              <a:t>11/13/25</a:t>
+              <a:t>10/26/26</a:t>
             </a:fld>
             <a:endParaRPr lang="en-US"/>
           </a:p>
@@ -3790,7 +3803,7 @@
           <a:p>
             <a:fld id="{43ED9329-DED2-9C4C-8B6A-8B4D879680E1}" type="datetimeFigureOut">
               <a:rPr lang="en-US" smtClean="0"/>
-              <a:t>11/13/25</a:t>
+              <a:t>10/26/26</a:t>
             </a:fld>
             <a:endParaRPr lang="en-US"/>
           </a:p>
@@ -4243,7 +4256,7 @@
           <a:p>
             <a:fld id="{43ED9329-DED2-9C4C-8B6A-8B4D879680E1}" type="datetimeFigureOut">
               <a:rPr lang="en-US" smtClean="0"/>
-              <a:t>11/13/25</a:t>
+              <a:t>10/26/26</a:t>
             </a:fld>
             <a:endParaRPr lang="en-US"/>
           </a:p>
@@ -4585,7 +4598,7 @@
           <a:p>
             <a:fld id="{43ED9329-DED2-9C4C-8B6A-8B4D879680E1}" type="datetimeFigureOut">
               <a:rPr lang="en-US" smtClean="0"/>
-              <a:t>11/13/25</a:t>
+              <a:t>10/26/26</a:t>
             </a:fld>
             <a:endParaRPr lang="en-US"/>
           </a:p>
@@ -5231,6 +5244,262 @@
   <p:cSld>
     <p:spTree>
       <p:nvGrpSpPr>
+        <p:cNvPr id="1" name="Shape 138"/>
+        <p:cNvGrpSpPr/>
+        <p:nvPr/>
+      </p:nvGrpSpPr>
+      <p:grpSpPr>
+        <a:xfrm>
+          <a:off x="0" y="0"/>
+          <a:ext cx="0" cy="0"/>
+          <a:chOff x="0" y="0"/>
+          <a:chExt cx="0" cy="0"/>
+        </a:xfrm>
+      </p:grpSpPr>
+      <p:sp>
+        <p:nvSpPr>
+          <p:cNvPr id="139" name="Google Shape;139;p28"/>
+          <p:cNvSpPr txBox="1">
+            <a:spLocks noGrp="1"/>
+          </p:cNvSpPr>
+          <p:nvPr>
+            <p:ph type="title"/>
+          </p:nvPr>
+        </p:nvSpPr>
+        <p:spPr>
+          <a:prstGeom prst="rect">
+            <a:avLst/>
+          </a:prstGeom>
+        </p:spPr>
+        <p:txBody>
+          <a:bodyPr spcFirstLastPara="1" vert="horz" wrap="square" lIns="91425" tIns="91425" rIns="91425" bIns="91425" rtlCol="0" anchor="b" anchorCtr="0">
+            <a:noAutofit/>
+          </a:bodyPr>
+          <a:lstStyle/>
+          <a:p>
+            <a:r>
+              <a:rPr lang="en">
+                <a:solidFill>
+                  <a:schemeClr val="accent1"/>
+                </a:solidFill>
+              </a:rPr>
+              <a:t>Residuals</a:t>
+            </a:r>
+            <a:endParaRPr baseline="30000">
+              <a:solidFill>
+                <a:schemeClr val="accent1"/>
+              </a:solidFill>
+            </a:endParaRPr>
+          </a:p>
+        </p:txBody>
+      </p:sp>
+      <p:sp>
+        <p:nvSpPr>
+          <p:cNvPr id="140" name="Google Shape;140;p28"/>
+          <p:cNvSpPr txBox="1">
+            <a:spLocks noGrp="1"/>
+          </p:cNvSpPr>
+          <p:nvPr>
+            <p:ph idx="1"/>
+          </p:nvPr>
+        </p:nvSpPr>
+        <p:spPr>
+          <a:xfrm>
+            <a:off x="0" y="2015732"/>
+            <a:ext cx="7644383" cy="4153420"/>
+          </a:xfrm>
+          <a:prstGeom prst="rect">
+            <a:avLst/>
+          </a:prstGeom>
+        </p:spPr>
+        <p:txBody>
+          <a:bodyPr spcFirstLastPara="1" vert="horz" wrap="square" lIns="91425" tIns="91425" rIns="91425" bIns="91425" rtlCol="0" anchor="t" anchorCtr="0">
+            <a:noAutofit/>
+          </a:bodyPr>
+          <a:lstStyle/>
+          <a:p>
+            <a:pPr marL="342900" indent="-342900">
+              <a:lnSpc>
+                <a:spcPct val="115000"/>
+              </a:lnSpc>
+              <a:spcBef>
+                <a:spcPts val="0"/>
+              </a:spcBef>
+            </a:pPr>
+            <a:r>
+              <a:rPr lang="en" sz="2200" b="1" dirty="0"/>
+              <a:t>Residuals</a:t>
+            </a:r>
+            <a:r>
+              <a:rPr lang="en" sz="2200" dirty="0"/>
+              <a:t> are the leftovers from the model fit.</a:t>
+            </a:r>
+          </a:p>
+          <a:p>
+            <a:pPr marL="800100" lvl="1" indent="-342900">
+              <a:lnSpc>
+                <a:spcPct val="115000"/>
+              </a:lnSpc>
+            </a:pPr>
+            <a:r>
+              <a:rPr lang="en" sz="2000" dirty="0"/>
+              <a:t>Data = Fit + Residual</a:t>
+            </a:r>
+          </a:p>
+          <a:p>
+            <a:pPr marL="342900" indent="-342900">
+              <a:lnSpc>
+                <a:spcPct val="115000"/>
+              </a:lnSpc>
+            </a:pPr>
+            <a:r>
+              <a:rPr lang="en" sz="2200" dirty="0"/>
+              <a:t>Larger residuals means the model differs from the data. </a:t>
+            </a:r>
+          </a:p>
+          <a:p>
+            <a:pPr marL="342900" indent="-342900">
+              <a:lnSpc>
+                <a:spcPct val="115000"/>
+              </a:lnSpc>
+            </a:pPr>
+            <a:r>
+              <a:rPr lang="en" sz="2200" dirty="0"/>
+              <a:t>Residuals can be totaled then compared. </a:t>
+            </a:r>
+          </a:p>
+          <a:p>
+            <a:pPr marL="342900" indent="-342900">
+              <a:lnSpc>
+                <a:spcPct val="115000"/>
+              </a:lnSpc>
+            </a:pPr>
+            <a:r>
+              <a:rPr lang="en" sz="2200" dirty="0"/>
+              <a:t>We can also phrase it as t</a:t>
+            </a:r>
+            <a:r>
+              <a:rPr lang="en-CA" sz="2200" dirty="0"/>
+              <a:t>he</a:t>
+            </a:r>
+            <a:r>
+              <a:rPr lang="en" sz="2200" dirty="0"/>
+              <a:t> variance in y that isn’t explained by the model. </a:t>
+            </a:r>
+          </a:p>
+          <a:p>
+            <a:pPr marL="800100" lvl="1" indent="-342900">
+              <a:lnSpc>
+                <a:spcPct val="115000"/>
+              </a:lnSpc>
+            </a:pPr>
+            <a:r>
+              <a:rPr lang="en" sz="2000" dirty="0"/>
+              <a:t>Model explains part of why Y values are what they are. </a:t>
+            </a:r>
+          </a:p>
+          <a:p>
+            <a:pPr marL="800100" lvl="1" indent="-342900">
+              <a:lnSpc>
+                <a:spcPct val="115000"/>
+              </a:lnSpc>
+            </a:pPr>
+            <a:r>
+              <a:rPr lang="en" sz="2000" dirty="0"/>
+              <a:t>Residuals is the amount of why that the model doesn’t capture. </a:t>
+            </a:r>
+          </a:p>
+          <a:p>
+            <a:pPr marL="342900" indent="-342900">
+              <a:lnSpc>
+                <a:spcPct val="115000"/>
+              </a:lnSpc>
+            </a:pPr>
+            <a:endParaRPr sz="2200" dirty="0"/>
+          </a:p>
+          <a:p>
+            <a:pPr marL="0" indent="0">
+              <a:lnSpc>
+                <a:spcPct val="115000"/>
+              </a:lnSpc>
+              <a:spcBef>
+                <a:spcPts val="0"/>
+              </a:spcBef>
+              <a:buClr>
+                <a:schemeClr val="dk1"/>
+              </a:buClr>
+              <a:buSzPts val="1100"/>
+              <a:buNone/>
+            </a:pPr>
+            <a:endParaRPr sz="2200" dirty="0"/>
+          </a:p>
+          <a:p>
+            <a:pPr marL="0" indent="0">
+              <a:lnSpc>
+                <a:spcPct val="115000"/>
+              </a:lnSpc>
+              <a:spcBef>
+                <a:spcPts val="0"/>
+              </a:spcBef>
+              <a:buNone/>
+            </a:pPr>
+            <a:endParaRPr sz="2200" dirty="0"/>
+          </a:p>
+          <a:p>
+            <a:pPr marL="0" indent="0">
+              <a:lnSpc>
+                <a:spcPct val="115000"/>
+              </a:lnSpc>
+              <a:spcBef>
+                <a:spcPts val="0"/>
+              </a:spcBef>
+              <a:buNone/>
+            </a:pPr>
+            <a:endParaRPr sz="2200" dirty="0"/>
+          </a:p>
+        </p:txBody>
+      </p:sp>
+      <p:pic>
+        <p:nvPicPr>
+          <p:cNvPr id="141" name="Google Shape;141;p28"/>
+          <p:cNvPicPr preferRelativeResize="0"/>
+          <p:nvPr/>
+        </p:nvPicPr>
+        <p:blipFill>
+          <a:blip r:embed="rId3">
+            <a:alphaModFix/>
+          </a:blip>
+          <a:stretch>
+            <a:fillRect/>
+          </a:stretch>
+        </p:blipFill>
+        <p:spPr>
+          <a:xfrm>
+            <a:off x="7644384" y="1853755"/>
+            <a:ext cx="4547616" cy="3864294"/>
+          </a:xfrm>
+          <a:prstGeom prst="rect">
+            <a:avLst/>
+          </a:prstGeom>
+          <a:noFill/>
+          <a:ln>
+            <a:noFill/>
+          </a:ln>
+        </p:spPr>
+      </p:pic>
+    </p:spTree>
+  </p:cSld>
+  <p:clrMapOvr>
+    <a:masterClrMapping/>
+  </p:clrMapOvr>
+</p:sld>
+</file>
+
+<file path=ppt/slides/slide11.xml><?xml version="1.0" encoding="utf-8"?>
+<p:sld xmlns:a="http://schemas.openxmlformats.org/drawingml/2006/main" xmlns:r="http://schemas.openxmlformats.org/officeDocument/2006/relationships" xmlns:p="http://schemas.openxmlformats.org/presentationml/2006/main">
+  <p:cSld>
+    <p:spTree>
+      <p:nvGrpSpPr>
         <p:cNvPr id="1" name="Shape 162"/>
         <p:cNvGrpSpPr/>
         <p:nvPr/>
@@ -5488,7 +5757,7 @@
 </p:sld>
 </file>
 
-<file path=ppt/slides/slide11.xml><?xml version="1.0" encoding="utf-8"?>
+<file path=ppt/slides/slide12.xml><?xml version="1.0" encoding="utf-8"?>
 <p:sld xmlns:a="http://schemas.openxmlformats.org/drawingml/2006/main" xmlns:r="http://schemas.openxmlformats.org/officeDocument/2006/relationships" xmlns:p="http://schemas.openxmlformats.org/presentationml/2006/main">
   <p:cSld>
     <p:spTree>
@@ -5615,7 +5884,7 @@
 </p:sld>
 </file>
 
-<file path=ppt/slides/slide12.xml><?xml version="1.0" encoding="utf-8"?>
+<file path=ppt/slides/slide13.xml><?xml version="1.0" encoding="utf-8"?>
 <p:sld xmlns:a="http://schemas.openxmlformats.org/drawingml/2006/main" xmlns:r="http://schemas.openxmlformats.org/officeDocument/2006/relationships" xmlns:p="http://schemas.openxmlformats.org/presentationml/2006/main">
   <p:cSld>
     <p:spTree>
@@ -5637,6 +5906,285 @@
           <p:cNvPr id="2" name="Title 1">
             <a:extLst>
               <a:ext uri="{FF2B5EF4-FFF2-40B4-BE49-F238E27FC236}">
+                <a16:creationId xmlns:a16="http://schemas.microsoft.com/office/drawing/2014/main" id="{48D80334-D39F-DE51-0D41-D5A34E473D70}"/>
+              </a:ext>
+            </a:extLst>
+          </p:cNvPr>
+          <p:cNvSpPr>
+            <a:spLocks noGrp="1"/>
+          </p:cNvSpPr>
+          <p:nvPr>
+            <p:ph type="title"/>
+          </p:nvPr>
+        </p:nvSpPr>
+        <p:spPr/>
+        <p:txBody>
+          <a:bodyPr/>
+          <a:lstStyle/>
+          <a:p>
+            <a:r>
+              <a:rPr lang="en-US" dirty="0"/>
+              <a:t>Aggregating Residuals and Loss</a:t>
+            </a:r>
+          </a:p>
+        </p:txBody>
+      </p:sp>
+      <p:sp>
+        <p:nvSpPr>
+          <p:cNvPr id="3" name="Content Placeholder 2">
+            <a:extLst>
+              <a:ext uri="{FF2B5EF4-FFF2-40B4-BE49-F238E27FC236}">
+                <a16:creationId xmlns:a16="http://schemas.microsoft.com/office/drawing/2014/main" id="{5ECEC326-9CF2-FC1C-CF4F-21658385B07A}"/>
+              </a:ext>
+            </a:extLst>
+          </p:cNvPr>
+          <p:cNvSpPr>
+            <a:spLocks noGrp="1"/>
+          </p:cNvSpPr>
+          <p:nvPr>
+            <p:ph idx="1"/>
+          </p:nvPr>
+        </p:nvSpPr>
+        <p:spPr>
+          <a:xfrm>
+            <a:off x="1451579" y="1853754"/>
+            <a:ext cx="9603275" cy="4095942"/>
+          </a:xfrm>
+        </p:spPr>
+        <p:txBody>
+          <a:bodyPr/>
+          <a:lstStyle/>
+          <a:p>
+            <a:r>
+              <a:rPr lang="en-US" dirty="0"/>
+              <a:t>We can aggregate the residuals to one measure, usually MSE/RMSE. </a:t>
+            </a:r>
+          </a:p>
+          <a:p>
+            <a:r>
+              <a:rPr lang="en-US" dirty="0"/>
+              <a:t>We can also refer to this as the cost. </a:t>
+            </a:r>
+          </a:p>
+          <a:p>
+            <a:r>
+              <a:rPr lang="en-US" b="1" dirty="0"/>
+              <a:t>The algorithm's goal is to minimize the cost. </a:t>
+            </a:r>
+          </a:p>
+          <a:p>
+            <a:pPr lvl="1"/>
+            <a:r>
+              <a:rPr lang="en-US" dirty="0"/>
+              <a:t>Lowest possible error, best accuracy, most reliable predictions. </a:t>
+            </a:r>
+          </a:p>
+          <a:p>
+            <a:r>
+              <a:rPr lang="en-US" dirty="0"/>
+              <a:t>*Cost/loss are common, often overlapping terms, that are technically different. </a:t>
+            </a:r>
+          </a:p>
+          <a:p>
+            <a:pPr lvl="1"/>
+            <a:r>
+              <a:rPr lang="en-US" dirty="0"/>
+              <a:t>Loss – the error of an individual prediction. </a:t>
+            </a:r>
+          </a:p>
+          <a:p>
+            <a:pPr lvl="1"/>
+            <a:r>
+              <a:rPr lang="en-US" dirty="0"/>
+              <a:t>Cost – the aggregate error of all predictions. </a:t>
+            </a:r>
+          </a:p>
+        </p:txBody>
+      </p:sp>
+    </p:spTree>
+    <p:extLst>
+      <p:ext uri="{BB962C8B-B14F-4D97-AF65-F5344CB8AC3E}">
+        <p14:creationId xmlns:p14="http://schemas.microsoft.com/office/powerpoint/2010/main" val="1879109763"/>
+      </p:ext>
+    </p:extLst>
+  </p:cSld>
+  <p:clrMapOvr>
+    <a:masterClrMapping/>
+  </p:clrMapOvr>
+</p:sld>
+</file>
+
+<file path=ppt/slides/slide14.xml><?xml version="1.0" encoding="utf-8"?>
+<p:sld xmlns:a="http://schemas.openxmlformats.org/drawingml/2006/main" xmlns:r="http://schemas.openxmlformats.org/officeDocument/2006/relationships" xmlns:p="http://schemas.openxmlformats.org/presentationml/2006/main">
+  <p:cSld>
+    <p:spTree>
+      <p:nvGrpSpPr>
+        <p:cNvPr id="1" name=""/>
+        <p:cNvGrpSpPr/>
+        <p:nvPr/>
+      </p:nvGrpSpPr>
+      <p:grpSpPr>
+        <a:xfrm>
+          <a:off x="0" y="0"/>
+          <a:ext cx="0" cy="0"/>
+          <a:chOff x="0" y="0"/>
+          <a:chExt cx="0" cy="0"/>
+        </a:xfrm>
+      </p:grpSpPr>
+      <p:sp>
+        <p:nvSpPr>
+          <p:cNvPr id="2" name="Title 1">
+            <a:extLst>
+              <a:ext uri="{FF2B5EF4-FFF2-40B4-BE49-F238E27FC236}">
+                <a16:creationId xmlns:a16="http://schemas.microsoft.com/office/drawing/2014/main" id="{19D7F0C6-EC92-B50D-D544-75DDAFAF714F}"/>
+              </a:ext>
+            </a:extLst>
+          </p:cNvPr>
+          <p:cNvSpPr>
+            <a:spLocks noGrp="1"/>
+          </p:cNvSpPr>
+          <p:nvPr>
+            <p:ph type="title"/>
+          </p:nvPr>
+        </p:nvSpPr>
+        <p:spPr/>
+        <p:txBody>
+          <a:bodyPr/>
+          <a:lstStyle/>
+          <a:p>
+            <a:r>
+              <a:rPr lang="en-US" dirty="0"/>
+              <a:t>So…</a:t>
+            </a:r>
+          </a:p>
+        </p:txBody>
+      </p:sp>
+      <p:sp>
+        <p:nvSpPr>
+          <p:cNvPr id="3" name="Content Placeholder 2">
+            <a:extLst>
+              <a:ext uri="{FF2B5EF4-FFF2-40B4-BE49-F238E27FC236}">
+                <a16:creationId xmlns:a16="http://schemas.microsoft.com/office/drawing/2014/main" id="{F34A5EAF-3AA8-2684-9B13-3798C996612B}"/>
+              </a:ext>
+            </a:extLst>
+          </p:cNvPr>
+          <p:cNvSpPr>
+            <a:spLocks noGrp="1"/>
+          </p:cNvSpPr>
+          <p:nvPr>
+            <p:ph idx="1"/>
+          </p:nvPr>
+        </p:nvSpPr>
+        <p:spPr>
+          <a:xfrm>
+            <a:off x="1451579" y="1853754"/>
+            <a:ext cx="9603275" cy="4199727"/>
+          </a:xfrm>
+        </p:spPr>
+        <p:txBody>
+          <a:bodyPr/>
+          <a:lstStyle/>
+          <a:p>
+            <a:r>
+              <a:rPr lang="en-US" dirty="0"/>
+              <a:t>The best fit line is a model of the scatter plot data. </a:t>
+            </a:r>
+          </a:p>
+          <a:p>
+            <a:r>
+              <a:rPr lang="en-US" dirty="0"/>
+              <a:t>The better it fits (smaller residuals), the more we can ‘trust’ it. </a:t>
+            </a:r>
+          </a:p>
+          <a:p>
+            <a:r>
+              <a:rPr lang="en-US" dirty="0"/>
+              <a:t>In a linear regression equation: y = </a:t>
+            </a:r>
+            <a:r>
+              <a:rPr lang="en-US" dirty="0" err="1"/>
+              <a:t>mx+b</a:t>
+            </a:r>
+            <a:endParaRPr lang="en-US" dirty="0"/>
+          </a:p>
+          <a:p>
+            <a:pPr lvl="1"/>
+            <a:r>
+              <a:rPr lang="en-US" dirty="0"/>
+              <a:t>Y = the prediction/target. </a:t>
+            </a:r>
+          </a:p>
+          <a:p>
+            <a:pPr lvl="1"/>
+            <a:r>
+              <a:rPr lang="en-US" dirty="0"/>
+              <a:t>X = the input (usually we have a bunch of x’s).</a:t>
+            </a:r>
+          </a:p>
+          <a:p>
+            <a:pPr lvl="1"/>
+            <a:r>
+              <a:rPr lang="en-US" dirty="0"/>
+              <a:t>M = slope (amount of increase/decrease in Y given a change in X). </a:t>
+            </a:r>
+          </a:p>
+          <a:p>
+            <a:pPr lvl="1"/>
+            <a:r>
+              <a:rPr lang="en-US" dirty="0"/>
+              <a:t>B = y-intercept (the starting point – if x=0, what’s y).</a:t>
+            </a:r>
+          </a:p>
+          <a:p>
+            <a:r>
+              <a:rPr lang="en-US" dirty="0"/>
+              <a:t>To make the model we need to determine (or ‘learn’) what m and b are. </a:t>
+            </a:r>
+          </a:p>
+          <a:p>
+            <a:pPr lvl="1"/>
+            <a:r>
+              <a:rPr lang="en-US" dirty="0"/>
+              <a:t>Which coefficients will minimize loss/cost (we commonly refer to error as loss). </a:t>
+            </a:r>
+          </a:p>
+        </p:txBody>
+      </p:sp>
+    </p:spTree>
+    <p:extLst>
+      <p:ext uri="{BB962C8B-B14F-4D97-AF65-F5344CB8AC3E}">
+        <p14:creationId xmlns:p14="http://schemas.microsoft.com/office/powerpoint/2010/main" val="1502937084"/>
+      </p:ext>
+    </p:extLst>
+  </p:cSld>
+  <p:clrMapOvr>
+    <a:masterClrMapping/>
+  </p:clrMapOvr>
+</p:sld>
+</file>
+
+<file path=ppt/slides/slide15.xml><?xml version="1.0" encoding="utf-8"?>
+<p:sld xmlns:a="http://schemas.openxmlformats.org/drawingml/2006/main" xmlns:r="http://schemas.openxmlformats.org/officeDocument/2006/relationships" xmlns:p="http://schemas.openxmlformats.org/presentationml/2006/main">
+  <p:cSld>
+    <p:spTree>
+      <p:nvGrpSpPr>
+        <p:cNvPr id="1" name=""/>
+        <p:cNvGrpSpPr/>
+        <p:nvPr/>
+      </p:nvGrpSpPr>
+      <p:grpSpPr>
+        <a:xfrm>
+          <a:off x="0" y="0"/>
+          <a:ext cx="0" cy="0"/>
+          <a:chOff x="0" y="0"/>
+          <a:chExt cx="0" cy="0"/>
+        </a:xfrm>
+      </p:grpSpPr>
+      <p:sp>
+        <p:nvSpPr>
+          <p:cNvPr id="2" name="Title 1">
+            <a:extLst>
+              <a:ext uri="{FF2B5EF4-FFF2-40B4-BE49-F238E27FC236}">
                 <a16:creationId xmlns:a16="http://schemas.microsoft.com/office/drawing/2014/main" id="{D2377D06-4713-E84F-8E72-AEB2C4E799B2}"/>
               </a:ext>
             </a:extLst>
@@ -5676,7 +6224,12 @@
             <p:ph idx="1"/>
           </p:nvPr>
         </p:nvSpPr>
-        <p:spPr/>
+        <p:spPr>
+          <a:xfrm>
+            <a:off x="1451579" y="2015732"/>
+            <a:ext cx="9603275" cy="4037749"/>
+          </a:xfrm>
+        </p:spPr>
         <p:txBody>
           <a:bodyPr/>
           <a:lstStyle/>
@@ -5741,7 +6294,152 @@
 </p:sld>
 </file>
 
-<file path=ppt/slides/slide13.xml><?xml version="1.0" encoding="utf-8"?>
+<file path=ppt/slides/slide16.xml><?xml version="1.0" encoding="utf-8"?>
+<p:sld xmlns:a="http://schemas.openxmlformats.org/drawingml/2006/main" xmlns:r="http://schemas.openxmlformats.org/officeDocument/2006/relationships" xmlns:p="http://schemas.openxmlformats.org/presentationml/2006/main">
+  <p:cSld>
+    <p:spTree>
+      <p:nvGrpSpPr>
+        <p:cNvPr id="1" name=""/>
+        <p:cNvGrpSpPr/>
+        <p:nvPr/>
+      </p:nvGrpSpPr>
+      <p:grpSpPr>
+        <a:xfrm>
+          <a:off x="0" y="0"/>
+          <a:ext cx="0" cy="0"/>
+          <a:chOff x="0" y="0"/>
+          <a:chExt cx="0" cy="0"/>
+        </a:xfrm>
+      </p:grpSpPr>
+      <p:sp>
+        <p:nvSpPr>
+          <p:cNvPr id="2" name="Title 1">
+            <a:extLst>
+              <a:ext uri="{FF2B5EF4-FFF2-40B4-BE49-F238E27FC236}">
+                <a16:creationId xmlns:a16="http://schemas.microsoft.com/office/drawing/2014/main" id="{795DCB48-9965-2FE5-1724-2689628FE0DC}"/>
+              </a:ext>
+            </a:extLst>
+          </p:cNvPr>
+          <p:cNvSpPr>
+            <a:spLocks noGrp="1"/>
+          </p:cNvSpPr>
+          <p:nvPr>
+            <p:ph type="title"/>
+          </p:nvPr>
+        </p:nvSpPr>
+        <p:spPr/>
+        <p:txBody>
+          <a:bodyPr/>
+          <a:lstStyle/>
+          <a:p>
+            <a:r>
+              <a:rPr lang="en-US" dirty="0"/>
+              <a:t>In general…</a:t>
+            </a:r>
+          </a:p>
+        </p:txBody>
+      </p:sp>
+      <p:sp>
+        <p:nvSpPr>
+          <p:cNvPr id="3" name="Content Placeholder 2">
+            <a:extLst>
+              <a:ext uri="{FF2B5EF4-FFF2-40B4-BE49-F238E27FC236}">
+                <a16:creationId xmlns:a16="http://schemas.microsoft.com/office/drawing/2014/main" id="{62629AFF-267C-C22E-49D8-A45F4252166A}"/>
+              </a:ext>
+            </a:extLst>
+          </p:cNvPr>
+          <p:cNvSpPr>
+            <a:spLocks noGrp="1"/>
+          </p:cNvSpPr>
+          <p:nvPr>
+            <p:ph idx="1"/>
+          </p:nvPr>
+        </p:nvSpPr>
+        <p:spPr>
+          <a:xfrm>
+            <a:off x="1137146" y="1853754"/>
+            <a:ext cx="10384293" cy="4199727"/>
+          </a:xfrm>
+        </p:spPr>
+        <p:txBody>
+          <a:bodyPr/>
+          <a:lstStyle/>
+          <a:p>
+            <a:r>
+              <a:rPr lang="en-US" dirty="0"/>
+              <a:t>The training/fitting/learning step is where a model calculates the stuff needed to predict. </a:t>
+            </a:r>
+          </a:p>
+          <a:p>
+            <a:pPr lvl="1"/>
+            <a:r>
+              <a:rPr lang="en-US" dirty="0"/>
+              <a:t>In regression m + b, in Bayes the probabilities. </a:t>
+            </a:r>
+          </a:p>
+          <a:p>
+            <a:pPr lvl="1"/>
+            <a:r>
+              <a:rPr lang="en-US" dirty="0"/>
+              <a:t>In other types of models it is some other set of calculations. </a:t>
+            </a:r>
+          </a:p>
+          <a:p>
+            <a:pPr lvl="1"/>
+            <a:r>
+              <a:rPr lang="en-US" b="1" dirty="0"/>
+              <a:t>In many cases, it isn’t simple math, it is an optimization process to find the parameters. </a:t>
+            </a:r>
+          </a:p>
+          <a:p>
+            <a:r>
+              <a:rPr lang="en-US" dirty="0"/>
+              <a:t>We can call the learned values parameters. </a:t>
+            </a:r>
+          </a:p>
+          <a:p>
+            <a:r>
+              <a:rPr lang="en-US" dirty="0"/>
+              <a:t>This training process is done with old data – we have the target/y. </a:t>
+            </a:r>
+          </a:p>
+          <a:p>
+            <a:r>
+              <a:rPr lang="en-US" dirty="0"/>
+              <a:t>Once this is done, we can generate new predictions. </a:t>
+            </a:r>
+          </a:p>
+          <a:p>
+            <a:pPr lvl="1"/>
+            <a:r>
+              <a:rPr lang="en-US" dirty="0"/>
+              <a:t>A new prediction requires parameters, new data (</a:t>
+            </a:r>
+            <a:r>
+              <a:rPr lang="en-US" dirty="0" err="1"/>
+              <a:t>Xs</a:t>
+            </a:r>
+            <a:r>
+              <a:rPr lang="en-US" dirty="0"/>
+              <a:t>), and the model. </a:t>
+            </a:r>
+          </a:p>
+        </p:txBody>
+      </p:sp>
+    </p:spTree>
+    <p:extLst>
+      <p:ext uri="{BB962C8B-B14F-4D97-AF65-F5344CB8AC3E}">
+        <p14:creationId xmlns:p14="http://schemas.microsoft.com/office/powerpoint/2010/main" val="2314286266"/>
+      </p:ext>
+    </p:extLst>
+  </p:cSld>
+  <p:clrMapOvr>
+    <a:masterClrMapping/>
+  </p:clrMapOvr>
+</p:sld>
+</file>
+
+<file path=ppt/slides/slide17.xml><?xml version="1.0" encoding="utf-8"?>
 <p:sld xmlns:a="http://schemas.openxmlformats.org/drawingml/2006/main" xmlns:r="http://schemas.openxmlformats.org/officeDocument/2006/relationships" xmlns:p="http://schemas.openxmlformats.org/presentationml/2006/main">
   <p:cSld>
     <p:bg>
@@ -6030,7 +6728,7 @@
 </p:sld>
 </file>
 
-<file path=ppt/slides/slide14.xml><?xml version="1.0" encoding="utf-8"?>
+<file path=ppt/slides/slide18.xml><?xml version="1.0" encoding="utf-8"?>
 <p:sld xmlns:a="http://schemas.openxmlformats.org/drawingml/2006/main" xmlns:r="http://schemas.openxmlformats.org/officeDocument/2006/relationships" xmlns:p="http://schemas.openxmlformats.org/presentationml/2006/main">
   <p:cSld>
     <p:spTree>
@@ -6285,7 +6983,7 @@
 </p:sld>
 </file>
 
-<file path=ppt/slides/slide15.xml><?xml version="1.0" encoding="utf-8"?>
+<file path=ppt/slides/slide19.xml><?xml version="1.0" encoding="utf-8"?>
 <p:sld xmlns:a="http://schemas.openxmlformats.org/drawingml/2006/main" xmlns:r="http://schemas.openxmlformats.org/officeDocument/2006/relationships" xmlns:p="http://schemas.openxmlformats.org/presentationml/2006/main">
   <p:cSld>
     <p:spTree>
@@ -6600,7 +7298,132 @@
 </p:sld>
 </file>
 
-<file path=ppt/slides/slide16.xml><?xml version="1.0" encoding="utf-8"?>
+<file path=ppt/slides/slide2.xml><?xml version="1.0" encoding="utf-8"?>
+<p:sld xmlns:a="http://schemas.openxmlformats.org/drawingml/2006/main" xmlns:r="http://schemas.openxmlformats.org/officeDocument/2006/relationships" xmlns:p="http://schemas.openxmlformats.org/presentationml/2006/main" show="0">
+  <p:cSld>
+    <p:spTree>
+      <p:nvGrpSpPr>
+        <p:cNvPr id="1" name=""/>
+        <p:cNvGrpSpPr/>
+        <p:nvPr/>
+      </p:nvGrpSpPr>
+      <p:grpSpPr>
+        <a:xfrm>
+          <a:off x="0" y="0"/>
+          <a:ext cx="0" cy="0"/>
+          <a:chOff x="0" y="0"/>
+          <a:chExt cx="0" cy="0"/>
+        </a:xfrm>
+      </p:grpSpPr>
+      <p:sp>
+        <p:nvSpPr>
+          <p:cNvPr id="2" name="Title 1">
+            <a:extLst>
+              <a:ext uri="{FF2B5EF4-FFF2-40B4-BE49-F238E27FC236}">
+                <a16:creationId xmlns:a16="http://schemas.microsoft.com/office/drawing/2014/main" id="{EE0DD664-EE5C-B6D8-4EDE-D3B1ED4F073F}"/>
+              </a:ext>
+            </a:extLst>
+          </p:cNvPr>
+          <p:cNvSpPr>
+            <a:spLocks noGrp="1"/>
+          </p:cNvSpPr>
+          <p:nvPr>
+            <p:ph type="title"/>
+          </p:nvPr>
+        </p:nvSpPr>
+        <p:spPr/>
+        <p:txBody>
+          <a:bodyPr/>
+          <a:lstStyle/>
+          <a:p>
+            <a:r>
+              <a:rPr lang="en-US" dirty="0"/>
+              <a:t>Other Logistics…</a:t>
+            </a:r>
+          </a:p>
+        </p:txBody>
+      </p:sp>
+      <p:sp>
+        <p:nvSpPr>
+          <p:cNvPr id="3" name="Content Placeholder 2">
+            <a:extLst>
+              <a:ext uri="{FF2B5EF4-FFF2-40B4-BE49-F238E27FC236}">
+                <a16:creationId xmlns:a16="http://schemas.microsoft.com/office/drawing/2014/main" id="{0AA97EF6-6FEF-1047-02C9-5689FDDE77E1}"/>
+              </a:ext>
+            </a:extLst>
+          </p:cNvPr>
+          <p:cNvSpPr>
+            <a:spLocks noGrp="1"/>
+          </p:cNvSpPr>
+          <p:nvPr>
+            <p:ph idx="1"/>
+          </p:nvPr>
+        </p:nvSpPr>
+        <p:spPr>
+          <a:xfrm>
+            <a:off x="1451579" y="1929284"/>
+            <a:ext cx="9603275" cy="4124197"/>
+          </a:xfrm>
+        </p:spPr>
+        <p:txBody>
+          <a:bodyPr/>
+          <a:lstStyle/>
+          <a:p>
+            <a:r>
+              <a:rPr lang="en-US" dirty="0"/>
+              <a:t>I’ll get the other assignments marked this weekend. </a:t>
+            </a:r>
+          </a:p>
+          <a:p>
+            <a:r>
+              <a:rPr lang="en-US" dirty="0"/>
+              <a:t>The assignment that was just assigned has a half that is on regression. </a:t>
+            </a:r>
+          </a:p>
+          <a:p>
+            <a:pPr lvl="1"/>
+            <a:r>
+              <a:rPr lang="en-US" dirty="0"/>
+              <a:t>We’ll cover that part next week. </a:t>
+            </a:r>
+          </a:p>
+          <a:p>
+            <a:pPr lvl="1"/>
+            <a:r>
+              <a:rPr lang="en-US" dirty="0"/>
+              <a:t>The actual question is quite easy, once you’ve seen it, it isn’t hard and doesn’t take long. </a:t>
+            </a:r>
+          </a:p>
+          <a:p>
+            <a:pPr lvl="1"/>
+            <a:r>
+              <a:rPr lang="en-US" dirty="0"/>
+              <a:t>We can set a date for that exam +1 week from when we cover regression. </a:t>
+            </a:r>
+          </a:p>
+          <a:p>
+            <a:pPr lvl="2"/>
+            <a:r>
+              <a:rPr lang="en-US" dirty="0"/>
+              <a:t>Likely next Thursday + 1 week. </a:t>
+            </a:r>
+          </a:p>
+        </p:txBody>
+      </p:sp>
+    </p:spTree>
+    <p:extLst>
+      <p:ext uri="{BB962C8B-B14F-4D97-AF65-F5344CB8AC3E}">
+        <p14:creationId xmlns:p14="http://schemas.microsoft.com/office/powerpoint/2010/main" val="2839469939"/>
+      </p:ext>
+    </p:extLst>
+  </p:cSld>
+  <p:clrMapOvr>
+    <a:masterClrMapping/>
+  </p:clrMapOvr>
+</p:sld>
+</file>
+
+<file path=ppt/slides/slide20.xml><?xml version="1.0" encoding="utf-8"?>
 <p:sld xmlns:a="http://schemas.openxmlformats.org/drawingml/2006/main" xmlns:r="http://schemas.openxmlformats.org/officeDocument/2006/relationships" xmlns:p="http://schemas.openxmlformats.org/presentationml/2006/main">
   <p:cSld>
     <p:spTree>
@@ -6760,7 +7583,415 @@
 </p:sld>
 </file>
 
-<file path=ppt/slides/slide17.xml><?xml version="1.0" encoding="utf-8"?>
+<file path=ppt/slides/slide21.xml><?xml version="1.0" encoding="utf-8"?>
+<p:sld xmlns:a="http://schemas.openxmlformats.org/drawingml/2006/main" xmlns:r="http://schemas.openxmlformats.org/officeDocument/2006/relationships" xmlns:p="http://schemas.openxmlformats.org/presentationml/2006/main">
+  <p:cSld>
+    <p:spTree>
+      <p:nvGrpSpPr>
+        <p:cNvPr id="1" name=""/>
+        <p:cNvGrpSpPr/>
+        <p:nvPr/>
+      </p:nvGrpSpPr>
+      <p:grpSpPr>
+        <a:xfrm>
+          <a:off x="0" y="0"/>
+          <a:ext cx="0" cy="0"/>
+          <a:chOff x="0" y="0"/>
+          <a:chExt cx="0" cy="0"/>
+        </a:xfrm>
+      </p:grpSpPr>
+      <p:sp>
+        <p:nvSpPr>
+          <p:cNvPr id="2" name="Title 1">
+            <a:extLst>
+              <a:ext uri="{FF2B5EF4-FFF2-40B4-BE49-F238E27FC236}">
+                <a16:creationId xmlns:a16="http://schemas.microsoft.com/office/drawing/2014/main" id="{87D5D5E6-0673-BEA4-A196-86FC81807C6A}"/>
+              </a:ext>
+            </a:extLst>
+          </p:cNvPr>
+          <p:cNvSpPr>
+            <a:spLocks noGrp="1"/>
+          </p:cNvSpPr>
+          <p:nvPr>
+            <p:ph type="title"/>
+          </p:nvPr>
+        </p:nvSpPr>
+        <p:spPr/>
+        <p:txBody>
+          <a:bodyPr/>
+          <a:lstStyle/>
+          <a:p>
+            <a:r>
+              <a:rPr lang="en-US" dirty="0"/>
+              <a:t>Model Meanings</a:t>
+            </a:r>
+          </a:p>
+        </p:txBody>
+      </p:sp>
+      <p:sp>
+        <p:nvSpPr>
+          <p:cNvPr id="3" name="Content Placeholder 2">
+            <a:extLst>
+              <a:ext uri="{FF2B5EF4-FFF2-40B4-BE49-F238E27FC236}">
+                <a16:creationId xmlns:a16="http://schemas.microsoft.com/office/drawing/2014/main" id="{8CD57338-AC81-31FE-3454-474D600F8C22}"/>
+              </a:ext>
+            </a:extLst>
+          </p:cNvPr>
+          <p:cNvSpPr>
+            <a:spLocks noGrp="1"/>
+          </p:cNvSpPr>
+          <p:nvPr>
+            <p:ph idx="1"/>
+          </p:nvPr>
+        </p:nvSpPr>
+        <p:spPr>
+          <a:xfrm>
+            <a:off x="0" y="1853754"/>
+            <a:ext cx="6184901" cy="4199727"/>
+          </a:xfrm>
+        </p:spPr>
+        <p:txBody>
+          <a:bodyPr>
+            <a:normAutofit/>
+          </a:bodyPr>
+          <a:lstStyle/>
+          <a:p>
+            <a:r>
+              <a:rPr lang="en-US" dirty="0"/>
+              <a:t>Model trained by calculating parameters from old data. </a:t>
+            </a:r>
+          </a:p>
+          <a:p>
+            <a:pPr lvl="1"/>
+            <a:r>
+              <a:rPr lang="en-US" dirty="0"/>
+              <a:t>These parameters are the ‘smarts’ of the model. </a:t>
+            </a:r>
+          </a:p>
+          <a:p>
+            <a:pPr lvl="1"/>
+            <a:r>
+              <a:rPr lang="en-US" dirty="0"/>
+              <a:t>LLM type models can have billions/trillions of params. </a:t>
+            </a:r>
+          </a:p>
+          <a:p>
+            <a:r>
+              <a:rPr lang="en-US" dirty="0"/>
+              <a:t>Making predictions requires:</a:t>
+            </a:r>
+          </a:p>
+          <a:p>
+            <a:pPr lvl="1"/>
+            <a:r>
+              <a:rPr lang="en-US" dirty="0"/>
+              <a:t>Parameters. </a:t>
+            </a:r>
+          </a:p>
+          <a:p>
+            <a:pPr lvl="1"/>
+            <a:r>
+              <a:rPr lang="en-US" dirty="0"/>
+              <a:t>New input data. </a:t>
+            </a:r>
+          </a:p>
+          <a:p>
+            <a:pPr lvl="1"/>
+            <a:r>
+              <a:rPr lang="en-US" dirty="0"/>
+              <a:t>Formula/algorithm. </a:t>
+            </a:r>
+          </a:p>
+          <a:p>
+            <a:r>
+              <a:rPr lang="en-US" dirty="0"/>
+              <a:t>Regression lets us examine the meaning of a prediction. </a:t>
+            </a:r>
+          </a:p>
+          <a:p>
+            <a:pPr lvl="1"/>
+            <a:r>
+              <a:rPr lang="en-US" dirty="0"/>
+              <a:t>M = change in y per change in x. </a:t>
+            </a:r>
+          </a:p>
+          <a:p>
+            <a:pPr lvl="1"/>
+            <a:r>
+              <a:rPr lang="en-US" dirty="0"/>
+              <a:t>B = starting point at x=0. </a:t>
+            </a:r>
+          </a:p>
+          <a:p>
+            <a:endParaRPr lang="en-US" dirty="0"/>
+          </a:p>
+        </p:txBody>
+      </p:sp>
+      <p:pic>
+        <p:nvPicPr>
+          <p:cNvPr id="4" name="Picture 3">
+            <a:extLst>
+              <a:ext uri="{FF2B5EF4-FFF2-40B4-BE49-F238E27FC236}">
+                <a16:creationId xmlns:a16="http://schemas.microsoft.com/office/drawing/2014/main" id="{EF31F0F6-FDA1-E27A-9A4D-642A9F71DD31}"/>
+              </a:ext>
+            </a:extLst>
+          </p:cNvPr>
+          <p:cNvPicPr>
+            <a:picLocks noChangeAspect="1"/>
+          </p:cNvPicPr>
+          <p:nvPr/>
+        </p:nvPicPr>
+        <p:blipFill>
+          <a:blip r:embed="rId2"/>
+          <a:stretch>
+            <a:fillRect/>
+          </a:stretch>
+        </p:blipFill>
+        <p:spPr>
+          <a:xfrm>
+            <a:off x="6184900" y="0"/>
+            <a:ext cx="6007100" cy="6756400"/>
+          </a:xfrm>
+          <a:prstGeom prst="rect">
+            <a:avLst/>
+          </a:prstGeom>
+        </p:spPr>
+      </p:pic>
+    </p:spTree>
+    <p:extLst>
+      <p:ext uri="{BB962C8B-B14F-4D97-AF65-F5344CB8AC3E}">
+        <p14:creationId xmlns:p14="http://schemas.microsoft.com/office/powerpoint/2010/main" val="1239738736"/>
+      </p:ext>
+    </p:extLst>
+  </p:cSld>
+  <p:clrMapOvr>
+    <a:masterClrMapping/>
+  </p:clrMapOvr>
+</p:sld>
+</file>
+
+<file path=ppt/slides/slide22.xml><?xml version="1.0" encoding="utf-8"?>
+<p:sld xmlns:a="http://schemas.openxmlformats.org/drawingml/2006/main" xmlns:r="http://schemas.openxmlformats.org/officeDocument/2006/relationships" xmlns:p="http://schemas.openxmlformats.org/presentationml/2006/main">
+  <p:cSld>
+    <p:spTree>
+      <p:nvGrpSpPr>
+        <p:cNvPr id="1" name=""/>
+        <p:cNvGrpSpPr/>
+        <p:nvPr/>
+      </p:nvGrpSpPr>
+      <p:grpSpPr>
+        <a:xfrm>
+          <a:off x="0" y="0"/>
+          <a:ext cx="0" cy="0"/>
+          <a:chOff x="0" y="0"/>
+          <a:chExt cx="0" cy="0"/>
+        </a:xfrm>
+      </p:grpSpPr>
+      <p:sp>
+        <p:nvSpPr>
+          <p:cNvPr id="2" name="Title 1">
+            <a:extLst>
+              <a:ext uri="{FF2B5EF4-FFF2-40B4-BE49-F238E27FC236}">
+                <a16:creationId xmlns:a16="http://schemas.microsoft.com/office/drawing/2014/main" id="{240EE4D1-FD8F-A62F-516F-76E1AC08856D}"/>
+              </a:ext>
+            </a:extLst>
+          </p:cNvPr>
+          <p:cNvSpPr>
+            <a:spLocks noGrp="1"/>
+          </p:cNvSpPr>
+          <p:nvPr>
+            <p:ph type="title"/>
+          </p:nvPr>
+        </p:nvSpPr>
+        <p:spPr/>
+        <p:txBody>
+          <a:bodyPr/>
+          <a:lstStyle/>
+          <a:p>
+            <a:r>
+              <a:rPr lang="en-US" dirty="0"/>
+              <a:t>Regression and Bayes</a:t>
+            </a:r>
+          </a:p>
+        </p:txBody>
+      </p:sp>
+      <p:sp>
+        <p:nvSpPr>
+          <p:cNvPr id="3" name="Content Placeholder 2">
+            <a:extLst>
+              <a:ext uri="{FF2B5EF4-FFF2-40B4-BE49-F238E27FC236}">
+                <a16:creationId xmlns:a16="http://schemas.microsoft.com/office/drawing/2014/main" id="{EE8523C4-8791-B413-9CF7-EB065E270B05}"/>
+              </a:ext>
+            </a:extLst>
+          </p:cNvPr>
+          <p:cNvSpPr>
+            <a:spLocks noGrp="1"/>
+          </p:cNvSpPr>
+          <p:nvPr>
+            <p:ph idx="1"/>
+          </p:nvPr>
+        </p:nvSpPr>
+        <p:spPr>
+          <a:xfrm>
+            <a:off x="1451579" y="2015732"/>
+            <a:ext cx="9603275" cy="4037749"/>
+          </a:xfrm>
+        </p:spPr>
+        <p:txBody>
+          <a:bodyPr/>
+          <a:lstStyle/>
+          <a:p>
+            <a:r>
+              <a:rPr lang="en-US" dirty="0"/>
+              <a:t>Each of the model types we’ve seen can do the same* predictions. </a:t>
+            </a:r>
+          </a:p>
+          <a:p>
+            <a:pPr lvl="1"/>
+            <a:r>
+              <a:rPr lang="en-US" dirty="0"/>
+              <a:t>Bayes does classification (categorical), regression does regression (numeric). </a:t>
+            </a:r>
+          </a:p>
+          <a:p>
+            <a:pPr lvl="1"/>
+            <a:r>
+              <a:rPr lang="en-US" dirty="0"/>
+              <a:t>There’s other versions for each, ignore for now. </a:t>
+            </a:r>
+          </a:p>
+          <a:p>
+            <a:r>
+              <a:rPr lang="en-US" dirty="0"/>
+              <a:t>Data – several </a:t>
+            </a:r>
+            <a:r>
+              <a:rPr lang="en-US" dirty="0" err="1"/>
+              <a:t>Xs</a:t>
+            </a:r>
+            <a:r>
+              <a:rPr lang="en-US" dirty="0"/>
+              <a:t>, one Y (target). </a:t>
+            </a:r>
+          </a:p>
+          <a:p>
+            <a:r>
+              <a:rPr lang="en-US" dirty="0"/>
+              <a:t>“Learning” – regression uses LLS (or alt.), bayes uses Bayes. Each calculates the key bits. </a:t>
+            </a:r>
+          </a:p>
+          <a:p>
+            <a:pPr lvl="1"/>
+            <a:r>
+              <a:rPr lang="en-US" dirty="0"/>
+              <a:t>Bayes has the probabilities, regression has the slopes and intercept. </a:t>
+            </a:r>
+          </a:p>
+          <a:p>
+            <a:r>
+              <a:rPr lang="en-US" dirty="0"/>
+              <a:t>Making a prediction – grab the appropriate pre-calculated values, crunch numbers. </a:t>
+            </a:r>
+          </a:p>
+        </p:txBody>
+      </p:sp>
+    </p:spTree>
+    <p:extLst>
+      <p:ext uri="{BB962C8B-B14F-4D97-AF65-F5344CB8AC3E}">
+        <p14:creationId xmlns:p14="http://schemas.microsoft.com/office/powerpoint/2010/main" val="2292174523"/>
+      </p:ext>
+    </p:extLst>
+  </p:cSld>
+  <p:clrMapOvr>
+    <a:masterClrMapping/>
+  </p:clrMapOvr>
+</p:sld>
+</file>
+
+<file path=ppt/slides/slide23.xml><?xml version="1.0" encoding="utf-8"?>
+<p:sld xmlns:a="http://schemas.openxmlformats.org/drawingml/2006/main" xmlns:r="http://schemas.openxmlformats.org/officeDocument/2006/relationships" xmlns:p="http://schemas.openxmlformats.org/presentationml/2006/main">
+  <p:cSld>
+    <p:spTree>
+      <p:nvGrpSpPr>
+        <p:cNvPr id="1" name=""/>
+        <p:cNvGrpSpPr/>
+        <p:nvPr/>
+      </p:nvGrpSpPr>
+      <p:grpSpPr>
+        <a:xfrm>
+          <a:off x="0" y="0"/>
+          <a:ext cx="0" cy="0"/>
+          <a:chOff x="0" y="0"/>
+          <a:chExt cx="0" cy="0"/>
+        </a:xfrm>
+      </p:grpSpPr>
+      <p:sp>
+        <p:nvSpPr>
+          <p:cNvPr id="2" name="Title 1">
+            <a:extLst>
+              <a:ext uri="{FF2B5EF4-FFF2-40B4-BE49-F238E27FC236}">
+                <a16:creationId xmlns:a16="http://schemas.microsoft.com/office/drawing/2014/main" id="{FE6E7C0C-C6AD-923D-3BD7-97FCD8911ADC}"/>
+              </a:ext>
+            </a:extLst>
+          </p:cNvPr>
+          <p:cNvSpPr>
+            <a:spLocks noGrp="1"/>
+          </p:cNvSpPr>
+          <p:nvPr>
+            <p:ph type="title"/>
+          </p:nvPr>
+        </p:nvSpPr>
+        <p:spPr/>
+        <p:txBody>
+          <a:bodyPr/>
+          <a:lstStyle/>
+          <a:p>
+            <a:r>
+              <a:rPr lang="en-US" dirty="0"/>
+              <a:t>Tuning and Improving Models</a:t>
+            </a:r>
+          </a:p>
+        </p:txBody>
+      </p:sp>
+      <p:sp>
+        <p:nvSpPr>
+          <p:cNvPr id="3" name="Content Placeholder 2">
+            <a:extLst>
+              <a:ext uri="{FF2B5EF4-FFF2-40B4-BE49-F238E27FC236}">
+                <a16:creationId xmlns:a16="http://schemas.microsoft.com/office/drawing/2014/main" id="{E2CD4100-8940-8A2D-847A-872F301EF06B}"/>
+              </a:ext>
+            </a:extLst>
+          </p:cNvPr>
+          <p:cNvSpPr>
+            <a:spLocks noGrp="1"/>
+          </p:cNvSpPr>
+          <p:nvPr>
+            <p:ph idx="1"/>
+          </p:nvPr>
+        </p:nvSpPr>
+        <p:spPr/>
+        <p:txBody>
+          <a:bodyPr/>
+          <a:lstStyle/>
+          <a:p>
+            <a:endParaRPr lang="en-US" dirty="0"/>
+          </a:p>
+        </p:txBody>
+      </p:sp>
+    </p:spTree>
+    <p:extLst>
+      <p:ext uri="{BB962C8B-B14F-4D97-AF65-F5344CB8AC3E}">
+        <p14:creationId xmlns:p14="http://schemas.microsoft.com/office/powerpoint/2010/main" val="4076795329"/>
+      </p:ext>
+    </p:extLst>
+  </p:cSld>
+  <p:clrMapOvr>
+    <a:masterClrMapping/>
+  </p:clrMapOvr>
+</p:sld>
+</file>
+
+<file path=ppt/slides/slide24.xml><?xml version="1.0" encoding="utf-8"?>
 <p:sld xmlns:a="http://schemas.openxmlformats.org/drawingml/2006/main" xmlns:r="http://schemas.openxmlformats.org/officeDocument/2006/relationships" xmlns:p="http://schemas.openxmlformats.org/presentationml/2006/main">
   <p:cSld>
     <p:spTree>
@@ -6936,7 +8167,7 @@
 </p:sld>
 </file>
 
-<file path=ppt/slides/slide18.xml><?xml version="1.0" encoding="utf-8"?>
+<file path=ppt/slides/slide25.xml><?xml version="1.0" encoding="utf-8"?>
 <p:sld xmlns:a="http://schemas.openxmlformats.org/drawingml/2006/main" xmlns:r="http://schemas.openxmlformats.org/officeDocument/2006/relationships" xmlns:p="http://schemas.openxmlformats.org/presentationml/2006/main">
   <p:cSld>
     <p:bg>
@@ -7077,6 +8308,13 @@
               <a:t>Think of what’s different if there’s a pattern in the residuals vs random.</a:t>
             </a:r>
           </a:p>
+          <a:p>
+            <a:pPr lvl="1"/>
+            <a:r>
+              <a:rPr lang="en-US" dirty="0"/>
+              <a:t>If the model always predicts too low?</a:t>
+            </a:r>
+          </a:p>
         </p:txBody>
       </p:sp>
       <p:pic>
@@ -7122,7 +8360,7 @@
 </p:sld>
 </file>
 
-<file path=ppt/slides/slide19.xml><?xml version="1.0" encoding="utf-8"?>
+<file path=ppt/slides/slide26.xml><?xml version="1.0" encoding="utf-8"?>
 <p:sld xmlns:a="http://schemas.openxmlformats.org/drawingml/2006/main" xmlns:r="http://schemas.openxmlformats.org/officeDocument/2006/relationships" xmlns:p="http://schemas.openxmlformats.org/presentationml/2006/main">
   <p:cSld>
     <p:bg>
@@ -7338,7 +8576,7 @@
 </p:sld>
 </file>
 
-<file path=ppt/slides/slide2.xml><?xml version="1.0" encoding="utf-8"?>
+<file path=ppt/slides/slide27.xml><?xml version="1.0" encoding="utf-8"?>
 <p:sld xmlns:a="http://schemas.openxmlformats.org/drawingml/2006/main" xmlns:r="http://schemas.openxmlformats.org/officeDocument/2006/relationships" xmlns:p="http://schemas.openxmlformats.org/presentationml/2006/main">
   <p:cSld>
     <p:spTree>
@@ -7360,7 +8598,7 @@
           <p:cNvPr id="2" name="Title 1">
             <a:extLst>
               <a:ext uri="{FF2B5EF4-FFF2-40B4-BE49-F238E27FC236}">
-                <a16:creationId xmlns:a16="http://schemas.microsoft.com/office/drawing/2014/main" id="{EE0DD664-EE5C-B6D8-4EDE-D3B1ED4F073F}"/>
+                <a16:creationId xmlns:a16="http://schemas.microsoft.com/office/drawing/2014/main" id="{AA8604A1-3C5F-6DE4-2A8F-246AB5A189EB}"/>
               </a:ext>
             </a:extLst>
           </p:cNvPr>
@@ -7378,7 +8616,7 @@
           <a:p>
             <a:r>
               <a:rPr lang="en-US" dirty="0"/>
-              <a:t>Other Logistics…</a:t>
+              <a:t>And Normal</a:t>
             </a:r>
           </a:p>
         </p:txBody>
@@ -7388,7 +8626,7 @@
           <p:cNvPr id="3" name="Content Placeholder 2">
             <a:extLst>
               <a:ext uri="{FF2B5EF4-FFF2-40B4-BE49-F238E27FC236}">
-                <a16:creationId xmlns:a16="http://schemas.microsoft.com/office/drawing/2014/main" id="{0AA97EF6-6FEF-1047-02C9-5689FDDE77E1}"/>
+                <a16:creationId xmlns:a16="http://schemas.microsoft.com/office/drawing/2014/main" id="{6CF2E973-C1F9-CF5A-57C5-874CFB5F9651}"/>
               </a:ext>
             </a:extLst>
           </p:cNvPr>
@@ -7401,8 +8639,8 @@
         </p:nvSpPr>
         <p:spPr>
           <a:xfrm>
-            <a:off x="1451579" y="1929284"/>
-            <a:ext cx="9603275" cy="4124197"/>
+            <a:off x="518811" y="1853754"/>
+            <a:ext cx="5734406" cy="4108134"/>
           </a:xfrm>
         </p:spPr>
         <p:txBody>
@@ -7411,49 +8649,87 @@
           <a:p>
             <a:r>
               <a:rPr lang="en-US" dirty="0"/>
-              <a:t>I’ll get the other assignments marked this weekend. </a:t>
-            </a:r>
-          </a:p>
-          <a:p>
-            <a:r>
-              <a:rPr lang="en-US" dirty="0"/>
-              <a:t>The assignment that was just assigned has a half that is on regression. </a:t>
+              <a:t>We also want the distribution of residuals to be roughly normal. </a:t>
             </a:r>
           </a:p>
           <a:p>
             <a:pPr lvl="1"/>
             <a:r>
               <a:rPr lang="en-US" dirty="0"/>
-              <a:t>We’ll cover that part next week. </a:t>
+              <a:t>We want any pattern ‘captured’ in the model. </a:t>
             </a:r>
           </a:p>
           <a:p>
             <a:pPr lvl="1"/>
             <a:r>
               <a:rPr lang="en-US" dirty="0"/>
-              <a:t>The actual question is quite easy, once you’ve seen it, it isn’t hard and doesn’t take long. </a:t>
+              <a:t>If residuals are mostly large, model may not fit. </a:t>
             </a:r>
           </a:p>
           <a:p>
             <a:pPr lvl="1"/>
             <a:r>
               <a:rPr lang="en-US" dirty="0"/>
-              <a:t>We can set a date for that exam +1 week from when we cover regression. </a:t>
-            </a:r>
-          </a:p>
-          <a:p>
-            <a:pPr lvl="2"/>
-            <a:r>
-              <a:rPr lang="en-US" dirty="0"/>
-              <a:t>Likely next Thursday + 1 week. </a:t>
-            </a:r>
-          </a:p>
-        </p:txBody>
-      </p:sp>
+              <a:t>The residuals are (ideally) random, most misses will be relatively small. </a:t>
+            </a:r>
+          </a:p>
+          <a:p>
+            <a:r>
+              <a:rPr lang="en-US" dirty="0"/>
+              <a:t>Can check with a normality plot or histogram. </a:t>
+            </a:r>
+          </a:p>
+          <a:p>
+            <a:r>
+              <a:rPr lang="en-US" dirty="0"/>
+              <a:t>This concept exists across all models, but harder </a:t>
+            </a:r>
+            <a:r>
+              <a:rPr lang="en-US"/>
+              <a:t>to picture. </a:t>
+            </a:r>
+            <a:endParaRPr lang="en-US" dirty="0"/>
+          </a:p>
+          <a:p>
+            <a:pPr lvl="1"/>
+            <a:endParaRPr lang="en-US" dirty="0"/>
+          </a:p>
+        </p:txBody>
+      </p:sp>
+      <p:pic>
+        <p:nvPicPr>
+          <p:cNvPr id="5" name="Picture 4" descr="Residual analysis plots of the NR-ANN model | Download Scientific Diagram">
+            <a:extLst>
+              <a:ext uri="{FF2B5EF4-FFF2-40B4-BE49-F238E27FC236}">
+                <a16:creationId xmlns:a16="http://schemas.microsoft.com/office/drawing/2014/main" id="{6CB86855-53EE-2DE8-1166-488A249698BC}"/>
+              </a:ext>
+            </a:extLst>
+          </p:cNvPr>
+          <p:cNvPicPr>
+            <a:picLocks noChangeAspect="1"/>
+          </p:cNvPicPr>
+          <p:nvPr/>
+        </p:nvPicPr>
+        <p:blipFill>
+          <a:blip r:embed="rId2"/>
+          <a:stretch>
+            <a:fillRect/>
+          </a:stretch>
+        </p:blipFill>
+        <p:spPr>
+          <a:xfrm>
+            <a:off x="6253216" y="1185464"/>
+            <a:ext cx="5734407" cy="4776424"/>
+          </a:xfrm>
+          <a:prstGeom prst="rect">
+            <a:avLst/>
+          </a:prstGeom>
+        </p:spPr>
+      </p:pic>
     </p:spTree>
     <p:extLst>
       <p:ext uri="{BB962C8B-B14F-4D97-AF65-F5344CB8AC3E}">
-        <p14:creationId xmlns:p14="http://schemas.microsoft.com/office/powerpoint/2010/main" val="2839469939"/>
+        <p14:creationId xmlns:p14="http://schemas.microsoft.com/office/powerpoint/2010/main" val="1563631804"/>
       </p:ext>
     </p:extLst>
   </p:cSld>
@@ -7463,7 +8739,7 @@
 </p:sld>
 </file>
 
-<file path=ppt/slides/slide20.xml><?xml version="1.0" encoding="utf-8"?>
+<file path=ppt/slides/slide28.xml><?xml version="1.0" encoding="utf-8"?>
 <p:sld xmlns:a="http://schemas.openxmlformats.org/drawingml/2006/main" xmlns:r="http://schemas.openxmlformats.org/officeDocument/2006/relationships" xmlns:p="http://schemas.openxmlformats.org/presentationml/2006/main">
   <p:cSld>
     <p:spTree>
@@ -7485,6 +8761,513 @@
           <p:cNvPr id="2" name="Title 1">
             <a:extLst>
               <a:ext uri="{FF2B5EF4-FFF2-40B4-BE49-F238E27FC236}">
+                <a16:creationId xmlns:a16="http://schemas.microsoft.com/office/drawing/2014/main" id="{F4972386-CDFE-911F-D93C-80A862A51CA4}"/>
+              </a:ext>
+            </a:extLst>
+          </p:cNvPr>
+          <p:cNvSpPr>
+            <a:spLocks noGrp="1"/>
+          </p:cNvSpPr>
+          <p:nvPr>
+            <p:ph type="title"/>
+          </p:nvPr>
+        </p:nvSpPr>
+        <p:spPr>
+          <a:xfrm>
+            <a:off x="4828030" y="804519"/>
+            <a:ext cx="7363970" cy="1049235"/>
+          </a:xfrm>
+        </p:spPr>
+        <p:txBody>
+          <a:bodyPr/>
+          <a:lstStyle/>
+          <a:p>
+            <a:r>
+              <a:rPr lang="en-US" dirty="0"/>
+              <a:t>Basic idea of Residual Based Tuning</a:t>
+            </a:r>
+          </a:p>
+        </p:txBody>
+      </p:sp>
+      <p:sp>
+        <p:nvSpPr>
+          <p:cNvPr id="3" name="Content Placeholder 2">
+            <a:extLst>
+              <a:ext uri="{FF2B5EF4-FFF2-40B4-BE49-F238E27FC236}">
+                <a16:creationId xmlns:a16="http://schemas.microsoft.com/office/drawing/2014/main" id="{CEC48035-1A5A-ADBF-37B2-42869D540837}"/>
+              </a:ext>
+            </a:extLst>
+          </p:cNvPr>
+          <p:cNvSpPr>
+            <a:spLocks noGrp="1"/>
+          </p:cNvSpPr>
+          <p:nvPr>
+            <p:ph idx="1"/>
+          </p:nvPr>
+        </p:nvSpPr>
+        <p:spPr>
+          <a:xfrm>
+            <a:off x="4828030" y="1853754"/>
+            <a:ext cx="7363970" cy="4199727"/>
+          </a:xfrm>
+        </p:spPr>
+        <p:txBody>
+          <a:bodyPr/>
+          <a:lstStyle/>
+          <a:p>
+            <a:r>
+              <a:rPr lang="en-US" dirty="0"/>
+              <a:t>Our model will have errors – residuals. </a:t>
+            </a:r>
+          </a:p>
+          <a:p>
+            <a:r>
+              <a:rPr lang="en-US" dirty="0"/>
+              <a:t>These errors can be grouped:</a:t>
+            </a:r>
+          </a:p>
+          <a:p>
+            <a:pPr lvl="1"/>
+            <a:r>
+              <a:rPr lang="en-US" dirty="0"/>
+              <a:t>Random – our model is good, but not perfect (normal). </a:t>
+            </a:r>
+          </a:p>
+          <a:p>
+            <a:pPr lvl="1"/>
+            <a:r>
+              <a:rPr lang="en-US" dirty="0"/>
+              <a:t>Systemic – there is some pattern in the residuals. </a:t>
+            </a:r>
+          </a:p>
+          <a:p>
+            <a:r>
+              <a:rPr lang="en-US" dirty="0"/>
+              <a:t>Pattern in residuals, we want to change the model to ‘explain’ it. </a:t>
+            </a:r>
+          </a:p>
+          <a:p>
+            <a:r>
+              <a:rPr lang="en-US" dirty="0"/>
+              <a:t>Explained variance view – y value varies, how well does the model explain that variation. </a:t>
+            </a:r>
+          </a:p>
+          <a:p>
+            <a:pPr lvl="1"/>
+            <a:r>
+              <a:rPr lang="en-US" dirty="0"/>
+              <a:t>Here the linear model can’t ‘explain’ the curve in the data. </a:t>
+            </a:r>
+          </a:p>
+          <a:p>
+            <a:pPr lvl="1"/>
+            <a:r>
+              <a:rPr lang="en-US" dirty="0"/>
+              <a:t>The quad. model explains the curve, but still has random error. </a:t>
+            </a:r>
+          </a:p>
+        </p:txBody>
+      </p:sp>
+      <p:pic>
+        <p:nvPicPr>
+          <p:cNvPr id="4" name="Picture 3" descr="linear vs quadratic model to fit non-linear data">
+            <a:extLst>
+              <a:ext uri="{FF2B5EF4-FFF2-40B4-BE49-F238E27FC236}">
+                <a16:creationId xmlns:a16="http://schemas.microsoft.com/office/drawing/2014/main" id="{894FEC17-132F-1237-DB7B-ABED7192093A}"/>
+              </a:ext>
+            </a:extLst>
+          </p:cNvPr>
+          <p:cNvPicPr>
+            <a:picLocks noChangeAspect="1"/>
+          </p:cNvPicPr>
+          <p:nvPr/>
+        </p:nvPicPr>
+        <p:blipFill>
+          <a:blip r:embed="rId2"/>
+          <a:stretch>
+            <a:fillRect/>
+          </a:stretch>
+        </p:blipFill>
+        <p:spPr>
+          <a:xfrm>
+            <a:off x="0" y="0"/>
+            <a:ext cx="4828032" cy="3269267"/>
+          </a:xfrm>
+          <a:prstGeom prst="rect">
+            <a:avLst/>
+          </a:prstGeom>
+        </p:spPr>
+      </p:pic>
+      <p:pic>
+        <p:nvPicPr>
+          <p:cNvPr id="5" name="Picture 4">
+            <a:extLst>
+              <a:ext uri="{FF2B5EF4-FFF2-40B4-BE49-F238E27FC236}">
+                <a16:creationId xmlns:a16="http://schemas.microsoft.com/office/drawing/2014/main" id="{E9CFE883-BC13-60BA-FEF6-58F04590FC71}"/>
+              </a:ext>
+            </a:extLst>
+          </p:cNvPr>
+          <p:cNvPicPr>
+            <a:picLocks noChangeAspect="1"/>
+          </p:cNvPicPr>
+          <p:nvPr/>
+        </p:nvPicPr>
+        <p:blipFill>
+          <a:blip r:embed="rId3"/>
+          <a:stretch>
+            <a:fillRect/>
+          </a:stretch>
+        </p:blipFill>
+        <p:spPr>
+          <a:xfrm>
+            <a:off x="-1" y="3269266"/>
+            <a:ext cx="4828031" cy="3269267"/>
+          </a:xfrm>
+          <a:prstGeom prst="rect">
+            <a:avLst/>
+          </a:prstGeom>
+        </p:spPr>
+      </p:pic>
+    </p:spTree>
+    <p:extLst>
+      <p:ext uri="{BB962C8B-B14F-4D97-AF65-F5344CB8AC3E}">
+        <p14:creationId xmlns:p14="http://schemas.microsoft.com/office/powerpoint/2010/main" val="516364698"/>
+      </p:ext>
+    </p:extLst>
+  </p:cSld>
+  <p:clrMapOvr>
+    <a:masterClrMapping/>
+  </p:clrMapOvr>
+</p:sld>
+</file>
+
+<file path=ppt/slides/slide29.xml><?xml version="1.0" encoding="utf-8"?>
+<p:sld xmlns:a="http://schemas.openxmlformats.org/drawingml/2006/main" xmlns:r="http://schemas.openxmlformats.org/officeDocument/2006/relationships" xmlns:p="http://schemas.openxmlformats.org/presentationml/2006/main">
+  <p:cSld>
+    <p:spTree>
+      <p:nvGrpSpPr>
+        <p:cNvPr id="1" name=""/>
+        <p:cNvGrpSpPr/>
+        <p:nvPr/>
+      </p:nvGrpSpPr>
+      <p:grpSpPr>
+        <a:xfrm>
+          <a:off x="0" y="0"/>
+          <a:ext cx="0" cy="0"/>
+          <a:chOff x="0" y="0"/>
+          <a:chExt cx="0" cy="0"/>
+        </a:xfrm>
+      </p:grpSpPr>
+      <p:sp>
+        <p:nvSpPr>
+          <p:cNvPr id="2" name="Title 1">
+            <a:extLst>
+              <a:ext uri="{FF2B5EF4-FFF2-40B4-BE49-F238E27FC236}">
+                <a16:creationId xmlns:a16="http://schemas.microsoft.com/office/drawing/2014/main" id="{9D895D92-9A13-D39E-087B-57C77AFA89BF}"/>
+              </a:ext>
+            </a:extLst>
+          </p:cNvPr>
+          <p:cNvSpPr>
+            <a:spLocks noGrp="1"/>
+          </p:cNvSpPr>
+          <p:nvPr>
+            <p:ph type="title"/>
+          </p:nvPr>
+        </p:nvSpPr>
+        <p:spPr/>
+        <p:txBody>
+          <a:bodyPr/>
+          <a:lstStyle/>
+          <a:p>
+            <a:r>
+              <a:rPr lang="en-US" dirty="0"/>
+              <a:t>Model Fit and Assumptions</a:t>
+            </a:r>
+          </a:p>
+        </p:txBody>
+      </p:sp>
+      <p:sp>
+        <p:nvSpPr>
+          <p:cNvPr id="3" name="Content Placeholder 2">
+            <a:extLst>
+              <a:ext uri="{FF2B5EF4-FFF2-40B4-BE49-F238E27FC236}">
+                <a16:creationId xmlns:a16="http://schemas.microsoft.com/office/drawing/2014/main" id="{300F80B4-57C0-F415-B387-9BC0048A57EB}"/>
+              </a:ext>
+            </a:extLst>
+          </p:cNvPr>
+          <p:cNvSpPr>
+            <a:spLocks noGrp="1"/>
+          </p:cNvSpPr>
+          <p:nvPr>
+            <p:ph idx="1"/>
+          </p:nvPr>
+        </p:nvSpPr>
+        <p:spPr>
+          <a:xfrm>
+            <a:off x="1451579" y="1853753"/>
+            <a:ext cx="9603275" cy="4199727"/>
+          </a:xfrm>
+        </p:spPr>
+        <p:txBody>
+          <a:bodyPr/>
+          <a:lstStyle/>
+          <a:p>
+            <a:r>
+              <a:rPr lang="en-US" dirty="0"/>
+              <a:t>As we can see here, there are some scenarios that a linear model can’t fit well. </a:t>
+            </a:r>
+          </a:p>
+          <a:p>
+            <a:r>
+              <a:rPr lang="en-US" dirty="0"/>
+              <a:t>Every model has assumptions, the more we match, the better. </a:t>
+            </a:r>
+          </a:p>
+          <a:p>
+            <a:r>
+              <a:rPr lang="en-US" dirty="0"/>
+              <a:t>For linear regression:</a:t>
+            </a:r>
+          </a:p>
+          <a:p>
+            <a:pPr lvl="1"/>
+            <a:r>
+              <a:rPr lang="en-US" dirty="0"/>
+              <a:t>Independent events. </a:t>
+            </a:r>
+          </a:p>
+          <a:p>
+            <a:pPr lvl="1"/>
+            <a:r>
+              <a:rPr lang="en-US" dirty="0"/>
+              <a:t>Linear relationship. </a:t>
+            </a:r>
+          </a:p>
+          <a:p>
+            <a:pPr lvl="1"/>
+            <a:r>
+              <a:rPr lang="en-US" dirty="0"/>
+              <a:t>No multicollinearity (correlation of features – soon). </a:t>
+            </a:r>
+          </a:p>
+          <a:p>
+            <a:pPr lvl="1"/>
+            <a:r>
+              <a:rPr lang="en-US" dirty="0"/>
+              <a:t>Homoscedasticity – variance of residuals is constant. </a:t>
+            </a:r>
+          </a:p>
+          <a:p>
+            <a:r>
+              <a:rPr lang="en-US" dirty="0"/>
+              <a:t>Bayes has others (independence of features, equal feature importance) and other areas where it is bad/good (e.g. no linear relationship assumption). </a:t>
+            </a:r>
+          </a:p>
+        </p:txBody>
+      </p:sp>
+    </p:spTree>
+    <p:extLst>
+      <p:ext uri="{BB962C8B-B14F-4D97-AF65-F5344CB8AC3E}">
+        <p14:creationId xmlns:p14="http://schemas.microsoft.com/office/powerpoint/2010/main" val="717416049"/>
+      </p:ext>
+    </p:extLst>
+  </p:cSld>
+  <p:clrMapOvr>
+    <a:masterClrMapping/>
+  </p:clrMapOvr>
+</p:sld>
+</file>
+
+<file path=ppt/slides/slide3.xml><?xml version="1.0" encoding="utf-8"?>
+<p:sld xmlns:a="http://schemas.openxmlformats.org/drawingml/2006/main" xmlns:r="http://schemas.openxmlformats.org/officeDocument/2006/relationships" xmlns:p="http://schemas.openxmlformats.org/presentationml/2006/main">
+  <p:cSld>
+    <p:spTree>
+      <p:nvGrpSpPr>
+        <p:cNvPr id="1" name=""/>
+        <p:cNvGrpSpPr/>
+        <p:nvPr/>
+      </p:nvGrpSpPr>
+      <p:grpSpPr>
+        <a:xfrm>
+          <a:off x="0" y="0"/>
+          <a:ext cx="0" cy="0"/>
+          <a:chOff x="0" y="0"/>
+          <a:chExt cx="0" cy="0"/>
+        </a:xfrm>
+      </p:grpSpPr>
+      <p:sp>
+        <p:nvSpPr>
+          <p:cNvPr id="2" name="Title 1">
+            <a:extLst>
+              <a:ext uri="{FF2B5EF4-FFF2-40B4-BE49-F238E27FC236}">
+                <a16:creationId xmlns:a16="http://schemas.microsoft.com/office/drawing/2014/main" id="{786C86F8-E267-0D46-B219-0ADCF4337BA9}"/>
+              </a:ext>
+            </a:extLst>
+          </p:cNvPr>
+          <p:cNvSpPr>
+            <a:spLocks noGrp="1"/>
+          </p:cNvSpPr>
+          <p:nvPr>
+            <p:ph type="ctrTitle"/>
+          </p:nvPr>
+        </p:nvSpPr>
+        <p:spPr/>
+        <p:txBody>
+          <a:bodyPr>
+            <a:normAutofit fontScale="90000"/>
+          </a:bodyPr>
+          <a:lstStyle/>
+          <a:p>
+            <a:r>
+              <a:rPr lang="en-US" dirty="0"/>
+              <a:t>Linear Least Squares, Regression, and More Fun Stuff!!! Part 1. </a:t>
+            </a:r>
+          </a:p>
+        </p:txBody>
+      </p:sp>
+      <p:sp>
+        <p:nvSpPr>
+          <p:cNvPr id="3" name="Subtitle 2">
+            <a:extLst>
+              <a:ext uri="{FF2B5EF4-FFF2-40B4-BE49-F238E27FC236}">
+                <a16:creationId xmlns:a16="http://schemas.microsoft.com/office/drawing/2014/main" id="{5FBA7666-BF3D-1449-A59F-D3BBC097A719}"/>
+              </a:ext>
+            </a:extLst>
+          </p:cNvPr>
+          <p:cNvSpPr>
+            <a:spLocks noGrp="1"/>
+          </p:cNvSpPr>
+          <p:nvPr>
+            <p:ph type="subTitle" idx="1"/>
+          </p:nvPr>
+        </p:nvSpPr>
+        <p:spPr/>
+        <p:txBody>
+          <a:bodyPr/>
+          <a:lstStyle/>
+          <a:p>
+            <a:endParaRPr lang="en-US"/>
+          </a:p>
+        </p:txBody>
+      </p:sp>
+    </p:spTree>
+    <p:extLst>
+      <p:ext uri="{BB962C8B-B14F-4D97-AF65-F5344CB8AC3E}">
+        <p14:creationId xmlns:p14="http://schemas.microsoft.com/office/powerpoint/2010/main" val="3076179563"/>
+      </p:ext>
+    </p:extLst>
+  </p:cSld>
+  <p:clrMapOvr>
+    <a:masterClrMapping/>
+  </p:clrMapOvr>
+</p:sld>
+</file>
+
+<file path=ppt/slides/slide30.xml><?xml version="1.0" encoding="utf-8"?>
+<p:sld xmlns:a="http://schemas.openxmlformats.org/drawingml/2006/main" xmlns:r="http://schemas.openxmlformats.org/officeDocument/2006/relationships" xmlns:p="http://schemas.openxmlformats.org/presentationml/2006/main">
+  <p:cSld>
+    <p:spTree>
+      <p:nvGrpSpPr>
+        <p:cNvPr id="1" name=""/>
+        <p:cNvGrpSpPr/>
+        <p:nvPr/>
+      </p:nvGrpSpPr>
+      <p:grpSpPr>
+        <a:xfrm>
+          <a:off x="0" y="0"/>
+          <a:ext cx="0" cy="0"/>
+          <a:chOff x="0" y="0"/>
+          <a:chExt cx="0" cy="0"/>
+        </a:xfrm>
+      </p:grpSpPr>
+      <p:sp>
+        <p:nvSpPr>
+          <p:cNvPr id="2" name="Title 1">
+            <a:extLst>
+              <a:ext uri="{FF2B5EF4-FFF2-40B4-BE49-F238E27FC236}">
+                <a16:creationId xmlns:a16="http://schemas.microsoft.com/office/drawing/2014/main" id="{64030E69-7F46-68DC-B9A8-55F5669385E3}"/>
+              </a:ext>
+            </a:extLst>
+          </p:cNvPr>
+          <p:cNvSpPr>
+            <a:spLocks noGrp="1"/>
+          </p:cNvSpPr>
+          <p:nvPr>
+            <p:ph type="title"/>
+          </p:nvPr>
+        </p:nvSpPr>
+        <p:spPr/>
+        <p:txBody>
+          <a:bodyPr/>
+          <a:lstStyle/>
+          <a:p>
+            <a:r>
+              <a:rPr lang="en-US" dirty="0"/>
+              <a:t>Regression… In Practice</a:t>
+            </a:r>
+          </a:p>
+        </p:txBody>
+      </p:sp>
+      <p:sp>
+        <p:nvSpPr>
+          <p:cNvPr id="3" name="Content Placeholder 2">
+            <a:extLst>
+              <a:ext uri="{FF2B5EF4-FFF2-40B4-BE49-F238E27FC236}">
+                <a16:creationId xmlns:a16="http://schemas.microsoft.com/office/drawing/2014/main" id="{3CFE6EF6-C362-4A45-FE29-6907A489A448}"/>
+              </a:ext>
+            </a:extLst>
+          </p:cNvPr>
+          <p:cNvSpPr>
+            <a:spLocks noGrp="1"/>
+          </p:cNvSpPr>
+          <p:nvPr>
+            <p:ph idx="1"/>
+          </p:nvPr>
+        </p:nvSpPr>
+        <p:spPr/>
+        <p:txBody>
+          <a:bodyPr/>
+          <a:lstStyle/>
+          <a:p>
+            <a:endParaRPr lang="en-US"/>
+          </a:p>
+        </p:txBody>
+      </p:sp>
+    </p:spTree>
+    <p:extLst>
+      <p:ext uri="{BB962C8B-B14F-4D97-AF65-F5344CB8AC3E}">
+        <p14:creationId xmlns:p14="http://schemas.microsoft.com/office/powerpoint/2010/main" val="1492069089"/>
+      </p:ext>
+    </p:extLst>
+  </p:cSld>
+  <p:clrMapOvr>
+    <a:masterClrMapping/>
+  </p:clrMapOvr>
+</p:sld>
+</file>
+
+<file path=ppt/slides/slide31.xml><?xml version="1.0" encoding="utf-8"?>
+<p:sld xmlns:a="http://schemas.openxmlformats.org/drawingml/2006/main" xmlns:r="http://schemas.openxmlformats.org/officeDocument/2006/relationships" xmlns:p="http://schemas.openxmlformats.org/presentationml/2006/main">
+  <p:cSld>
+    <p:spTree>
+      <p:nvGrpSpPr>
+        <p:cNvPr id="1" name=""/>
+        <p:cNvGrpSpPr/>
+        <p:nvPr/>
+      </p:nvGrpSpPr>
+      <p:grpSpPr>
+        <a:xfrm>
+          <a:off x="0" y="0"/>
+          <a:ext cx="0" cy="0"/>
+          <a:chOff x="0" y="0"/>
+          <a:chExt cx="0" cy="0"/>
+        </a:xfrm>
+      </p:grpSpPr>
+      <p:sp>
+        <p:nvSpPr>
+          <p:cNvPr id="2" name="Title 1">
+            <a:extLst>
+              <a:ext uri="{FF2B5EF4-FFF2-40B4-BE49-F238E27FC236}">
                 <a16:creationId xmlns:a16="http://schemas.microsoft.com/office/drawing/2014/main" id="{77C3FDD7-7164-3D44-B4AF-1B7CD86E680E}"/>
               </a:ext>
             </a:extLst>
@@ -7670,7 +9453,7 @@
 </p:sld>
 </file>
 
-<file path=ppt/slides/slide21.xml><?xml version="1.0" encoding="utf-8"?>
+<file path=ppt/slides/slide32.xml><?xml version="1.0" encoding="utf-8"?>
 <p:sld xmlns:a="http://schemas.openxmlformats.org/drawingml/2006/main" xmlns:r="http://schemas.openxmlformats.org/officeDocument/2006/relationships" xmlns:p="http://schemas.openxmlformats.org/presentationml/2006/main">
   <p:cSld>
     <p:bg>
@@ -7966,7 +9749,7 @@
 </p:sld>
 </file>
 
-<file path=ppt/slides/slide22.xml><?xml version="1.0" encoding="utf-8"?>
+<file path=ppt/slides/slide33.xml><?xml version="1.0" encoding="utf-8"?>
 <p:sld xmlns:a="http://schemas.openxmlformats.org/drawingml/2006/main" xmlns:r="http://schemas.openxmlformats.org/officeDocument/2006/relationships" xmlns:p="http://schemas.openxmlformats.org/presentationml/2006/main">
   <p:cSld>
     <p:spTree>
@@ -8139,7 +9922,152 @@
 </p:sld>
 </file>
 
-<file path=ppt/slides/slide23.xml><?xml version="1.0" encoding="utf-8"?>
+<file path=ppt/slides/slide34.xml><?xml version="1.0" encoding="utf-8"?>
+<p:sld xmlns:a="http://schemas.openxmlformats.org/drawingml/2006/main" xmlns:r="http://schemas.openxmlformats.org/officeDocument/2006/relationships" xmlns:p="http://schemas.openxmlformats.org/presentationml/2006/main" show="0">
+  <p:cSld>
+    <p:spTree>
+      <p:nvGrpSpPr>
+        <p:cNvPr id="1" name=""/>
+        <p:cNvGrpSpPr/>
+        <p:nvPr/>
+      </p:nvGrpSpPr>
+      <p:grpSpPr>
+        <a:xfrm>
+          <a:off x="0" y="0"/>
+          <a:ext cx="0" cy="0"/>
+          <a:chOff x="0" y="0"/>
+          <a:chExt cx="0" cy="0"/>
+        </a:xfrm>
+      </p:grpSpPr>
+      <p:sp>
+        <p:nvSpPr>
+          <p:cNvPr id="2" name="Title 1">
+            <a:extLst>
+              <a:ext uri="{FF2B5EF4-FFF2-40B4-BE49-F238E27FC236}">
+                <a16:creationId xmlns:a16="http://schemas.microsoft.com/office/drawing/2014/main" id="{E47DA03E-21CB-C7A7-F4D7-221FC84F3E68}"/>
+              </a:ext>
+            </a:extLst>
+          </p:cNvPr>
+          <p:cNvSpPr>
+            <a:spLocks noGrp="1"/>
+          </p:cNvSpPr>
+          <p:nvPr>
+            <p:ph type="title"/>
+          </p:nvPr>
+        </p:nvSpPr>
+        <p:spPr/>
+        <p:txBody>
+          <a:bodyPr/>
+          <a:lstStyle/>
+          <a:p>
+            <a:r>
+              <a:rPr lang="en-US" dirty="0"/>
+              <a:t>Parameters and Learning</a:t>
+            </a:r>
+          </a:p>
+        </p:txBody>
+      </p:sp>
+      <p:sp>
+        <p:nvSpPr>
+          <p:cNvPr id="3" name="Content Placeholder 2">
+            <a:extLst>
+              <a:ext uri="{FF2B5EF4-FFF2-40B4-BE49-F238E27FC236}">
+                <a16:creationId xmlns:a16="http://schemas.microsoft.com/office/drawing/2014/main" id="{11115163-4404-7513-E851-AF880BAA5CE8}"/>
+              </a:ext>
+            </a:extLst>
+          </p:cNvPr>
+          <p:cNvSpPr>
+            <a:spLocks noGrp="1"/>
+          </p:cNvSpPr>
+          <p:nvPr>
+            <p:ph idx="1"/>
+          </p:nvPr>
+        </p:nvSpPr>
+        <p:spPr>
+          <a:xfrm>
+            <a:off x="1451579" y="1853754"/>
+            <a:ext cx="9603275" cy="4199727"/>
+          </a:xfrm>
+        </p:spPr>
+        <p:txBody>
+          <a:bodyPr/>
+          <a:lstStyle/>
+          <a:p>
+            <a:r>
+              <a:rPr lang="en-US" dirty="0"/>
+              <a:t>The model is trained by letting it calculate parameters from old data. </a:t>
+            </a:r>
+          </a:p>
+          <a:p>
+            <a:pPr lvl="1"/>
+            <a:r>
+              <a:rPr lang="en-US" dirty="0"/>
+              <a:t>These parameters are the ‘smarts’ of the model. </a:t>
+            </a:r>
+          </a:p>
+          <a:p>
+            <a:r>
+              <a:rPr lang="en-US" dirty="0"/>
+              <a:t>Making predictions requires:</a:t>
+            </a:r>
+          </a:p>
+          <a:p>
+            <a:pPr lvl="1"/>
+            <a:r>
+              <a:rPr lang="en-US" dirty="0"/>
+              <a:t>Parameters. </a:t>
+            </a:r>
+          </a:p>
+          <a:p>
+            <a:pPr lvl="1"/>
+            <a:r>
+              <a:rPr lang="en-US" dirty="0"/>
+              <a:t>New input data. </a:t>
+            </a:r>
+          </a:p>
+          <a:p>
+            <a:pPr lvl="1"/>
+            <a:r>
+              <a:rPr lang="en-US" dirty="0"/>
+              <a:t>Formula/algorithm. </a:t>
+            </a:r>
+          </a:p>
+          <a:p>
+            <a:r>
+              <a:rPr lang="en-US" dirty="0"/>
+              <a:t>In regression, we can examine the meaning of a prediction. </a:t>
+            </a:r>
+          </a:p>
+          <a:p>
+            <a:pPr lvl="1"/>
+            <a:r>
+              <a:rPr lang="en-US" dirty="0"/>
+              <a:t>M = change in y per change in x. </a:t>
+            </a:r>
+          </a:p>
+          <a:p>
+            <a:pPr lvl="1"/>
+            <a:r>
+              <a:rPr lang="en-US" dirty="0"/>
+              <a:t>B = starting point at x=0. </a:t>
+            </a:r>
+          </a:p>
+        </p:txBody>
+      </p:sp>
+    </p:spTree>
+    <p:extLst>
+      <p:ext uri="{BB962C8B-B14F-4D97-AF65-F5344CB8AC3E}">
+        <p14:creationId xmlns:p14="http://schemas.microsoft.com/office/powerpoint/2010/main" val="2402582137"/>
+      </p:ext>
+    </p:extLst>
+  </p:cSld>
+  <p:clrMapOvr>
+    <a:masterClrMapping/>
+  </p:clrMapOvr>
+</p:sld>
+</file>
+
+<file path=ppt/slides/slide35.xml><?xml version="1.0" encoding="utf-8"?>
 <p:sld xmlns:a="http://schemas.openxmlformats.org/drawingml/2006/main" xmlns:r="http://schemas.openxmlformats.org/officeDocument/2006/relationships" xmlns:p="http://schemas.openxmlformats.org/presentationml/2006/main">
   <p:cSld>
     <p:spTree>
@@ -8161,7 +10089,7 @@
           <p:cNvPr id="2" name="Title 1">
             <a:extLst>
               <a:ext uri="{FF2B5EF4-FFF2-40B4-BE49-F238E27FC236}">
-                <a16:creationId xmlns:a16="http://schemas.microsoft.com/office/drawing/2014/main" id="{22AE5CF6-8B41-ED49-BBCA-960CCDE6DC07}"/>
+                <a16:creationId xmlns:a16="http://schemas.microsoft.com/office/drawing/2014/main" id="{1D8C752E-2891-FAAE-E236-3EDE1F7ECB3A}"/>
               </a:ext>
             </a:extLst>
           </p:cNvPr>
@@ -8177,10 +10105,7 @@
           <a:bodyPr/>
           <a:lstStyle/>
           <a:p>
-            <a:r>
-              <a:rPr lang="en-US" dirty="0"/>
-              <a:t>Conclusion</a:t>
-            </a:r>
+            <a:endParaRPr lang="en-US"/>
           </a:p>
         </p:txBody>
       </p:sp>
@@ -8189,7 +10114,7 @@
           <p:cNvPr id="3" name="Content Placeholder 2">
             <a:extLst>
               <a:ext uri="{FF2B5EF4-FFF2-40B4-BE49-F238E27FC236}">
-                <a16:creationId xmlns:a16="http://schemas.microsoft.com/office/drawing/2014/main" id="{2CE57ECC-D5E7-8742-82DE-6541E34B1064}"/>
+                <a16:creationId xmlns:a16="http://schemas.microsoft.com/office/drawing/2014/main" id="{2F607788-B31E-DD49-0A5F-95BC81A849D8}"/>
               </a:ext>
             </a:extLst>
           </p:cNvPr>
@@ -8200,102 +10125,19 @@
             <p:ph idx="1"/>
           </p:nvPr>
         </p:nvSpPr>
-        <p:spPr>
-          <a:xfrm>
-            <a:off x="1451579" y="1853754"/>
-            <a:ext cx="9603275" cy="4199727"/>
-          </a:xfrm>
-        </p:spPr>
-        <p:txBody>
-          <a:bodyPr>
-            <a:normAutofit/>
-          </a:bodyPr>
-          <a:lstStyle/>
-          <a:p>
-            <a:r>
-              <a:rPr lang="en-US" dirty="0"/>
-              <a:t>We can train our models to predict Y, given X.</a:t>
-            </a:r>
-          </a:p>
-          <a:p>
-            <a:pPr lvl="1"/>
-            <a:r>
-              <a:rPr lang="en-US" dirty="0"/>
-              <a:t>Models always predict an output given an input, the how can vary widely. </a:t>
-            </a:r>
-          </a:p>
-          <a:p>
-            <a:pPr lvl="1"/>
-            <a:r>
-              <a:rPr lang="en-US" dirty="0"/>
-              <a:t>In this case, the model is a simple algebra equation, y=</a:t>
-            </a:r>
-            <a:r>
-              <a:rPr lang="en-US" dirty="0" err="1"/>
-              <a:t>mx+b</a:t>
-            </a:r>
-            <a:r>
-              <a:rPr lang="en-US" dirty="0"/>
-              <a:t>. </a:t>
-            </a:r>
-          </a:p>
-          <a:p>
-            <a:pPr lvl="1"/>
-            <a:r>
-              <a:rPr lang="en-US" dirty="0"/>
-              <a:t>The model is a simplification of reality – will someone pay, will customer come, will it rain…</a:t>
-            </a:r>
-          </a:p>
-          <a:p>
-            <a:pPr lvl="1"/>
-            <a:r>
-              <a:rPr lang="en-US" dirty="0"/>
-              <a:t>Our steps are the same no matter model type we use (LR, NN, Tree…), internal math differs.</a:t>
-            </a:r>
-          </a:p>
-          <a:p>
-            <a:r>
-              <a:rPr lang="en-US" dirty="0"/>
-              <a:t>The residuals give us information on how good our model is. </a:t>
-            </a:r>
-          </a:p>
-          <a:p>
-            <a:pPr lvl="1"/>
-            <a:r>
-              <a:rPr lang="en-US" dirty="0"/>
-              <a:t>Big misses, bad model. Small misses, good model. </a:t>
-            </a:r>
-          </a:p>
-          <a:p>
-            <a:pPr lvl="1"/>
-            <a:r>
-              <a:rPr lang="en-US" dirty="0"/>
-              <a:t>We can compare different types of models to choose the most accurate. </a:t>
-            </a:r>
-          </a:p>
-          <a:p>
-            <a:r>
-              <a:rPr lang="en-US" dirty="0"/>
-              <a:t>Accuracy and reliability of the predictions…. Next time. </a:t>
-            </a:r>
-          </a:p>
-          <a:p>
-            <a:pPr lvl="1"/>
-            <a:r>
-              <a:rPr lang="en-US" dirty="0"/>
-              <a:t>Models made differently can be compared and evaluated. </a:t>
-            </a:r>
-          </a:p>
-          <a:p>
-            <a:pPr lvl="1"/>
-            <a:endParaRPr lang="en-US" dirty="0"/>
+        <p:spPr/>
+        <p:txBody>
+          <a:bodyPr/>
+          <a:lstStyle/>
+          <a:p>
+            <a:endParaRPr lang="en-US"/>
           </a:p>
         </p:txBody>
       </p:sp>
     </p:spTree>
     <p:extLst>
       <p:ext uri="{BB962C8B-B14F-4D97-AF65-F5344CB8AC3E}">
-        <p14:creationId xmlns:p14="http://schemas.microsoft.com/office/powerpoint/2010/main" val="3713883451"/>
+        <p14:creationId xmlns:p14="http://schemas.microsoft.com/office/powerpoint/2010/main" val="3534607507"/>
       </p:ext>
     </p:extLst>
   </p:cSld>
@@ -8305,7 +10147,7 @@
 </p:sld>
 </file>
 
-<file path=ppt/slides/slide3.xml><?xml version="1.0" encoding="utf-8"?>
+<file path=ppt/slides/slide36.xml><?xml version="1.0" encoding="utf-8"?>
 <p:sld xmlns:a="http://schemas.openxmlformats.org/drawingml/2006/main" xmlns:r="http://schemas.openxmlformats.org/officeDocument/2006/relationships" xmlns:p="http://schemas.openxmlformats.org/presentationml/2006/main">
   <p:cSld>
     <p:spTree>
@@ -8327,7 +10169,7 @@
           <p:cNvPr id="2" name="Title 1">
             <a:extLst>
               <a:ext uri="{FF2B5EF4-FFF2-40B4-BE49-F238E27FC236}">
-                <a16:creationId xmlns:a16="http://schemas.microsoft.com/office/drawing/2014/main" id="{786C86F8-E267-0D46-B219-0ADCF4337BA9}"/>
+                <a16:creationId xmlns:a16="http://schemas.microsoft.com/office/drawing/2014/main" id="{22AE5CF6-8B41-ED49-BBCA-960CCDE6DC07}"/>
               </a:ext>
             </a:extLst>
           </p:cNvPr>
@@ -8335,29 +10177,27 @@
             <a:spLocks noGrp="1"/>
           </p:cNvSpPr>
           <p:nvPr>
-            <p:ph type="ctrTitle"/>
+            <p:ph type="title"/>
           </p:nvPr>
         </p:nvSpPr>
         <p:spPr/>
         <p:txBody>
-          <a:bodyPr>
-            <a:normAutofit fontScale="90000"/>
-          </a:bodyPr>
-          <a:lstStyle/>
-          <a:p>
-            <a:r>
-              <a:rPr lang="en-US" dirty="0"/>
-              <a:t>Linear Least Squares, Regression, and More Fun Stuff!!! Part 1. </a:t>
-            </a:r>
-          </a:p>
-        </p:txBody>
-      </p:sp>
-      <p:sp>
-        <p:nvSpPr>
-          <p:cNvPr id="3" name="Subtitle 2">
+          <a:bodyPr/>
+          <a:lstStyle/>
+          <a:p>
+            <a:r>
+              <a:rPr lang="en-US" dirty="0"/>
+              <a:t>Conclusion</a:t>
+            </a:r>
+          </a:p>
+        </p:txBody>
+      </p:sp>
+      <p:sp>
+        <p:nvSpPr>
+          <p:cNvPr id="3" name="Content Placeholder 2">
             <a:extLst>
               <a:ext uri="{FF2B5EF4-FFF2-40B4-BE49-F238E27FC236}">
-                <a16:creationId xmlns:a16="http://schemas.microsoft.com/office/drawing/2014/main" id="{5FBA7666-BF3D-1449-A59F-D3BBC097A719}"/>
+                <a16:creationId xmlns:a16="http://schemas.microsoft.com/office/drawing/2014/main" id="{2CE57ECC-D5E7-8742-82DE-6541E34B1064}"/>
               </a:ext>
             </a:extLst>
           </p:cNvPr>
@@ -8365,22 +10205,105 @@
             <a:spLocks noGrp="1"/>
           </p:cNvSpPr>
           <p:nvPr>
-            <p:ph type="subTitle" idx="1"/>
-          </p:nvPr>
-        </p:nvSpPr>
-        <p:spPr/>
-        <p:txBody>
-          <a:bodyPr/>
-          <a:lstStyle/>
-          <a:p>
-            <a:endParaRPr lang="en-US"/>
+            <p:ph idx="1"/>
+          </p:nvPr>
+        </p:nvSpPr>
+        <p:spPr>
+          <a:xfrm>
+            <a:off x="1451579" y="1853754"/>
+            <a:ext cx="9603275" cy="4199727"/>
+          </a:xfrm>
+        </p:spPr>
+        <p:txBody>
+          <a:bodyPr>
+            <a:normAutofit/>
+          </a:bodyPr>
+          <a:lstStyle/>
+          <a:p>
+            <a:r>
+              <a:rPr lang="en-US" dirty="0"/>
+              <a:t>We can train our models to predict Y, given X.</a:t>
+            </a:r>
+          </a:p>
+          <a:p>
+            <a:pPr lvl="1"/>
+            <a:r>
+              <a:rPr lang="en-US" dirty="0"/>
+              <a:t>Models always predict an output given an input, the how can vary widely. </a:t>
+            </a:r>
+          </a:p>
+          <a:p>
+            <a:pPr lvl="1"/>
+            <a:r>
+              <a:rPr lang="en-US" dirty="0"/>
+              <a:t>In this case, the model is a simple algebra equation, y=</a:t>
+            </a:r>
+            <a:r>
+              <a:rPr lang="en-US" dirty="0" err="1"/>
+              <a:t>mx+b</a:t>
+            </a:r>
+            <a:r>
+              <a:rPr lang="en-US" dirty="0"/>
+              <a:t>. </a:t>
+            </a:r>
+          </a:p>
+          <a:p>
+            <a:pPr lvl="1"/>
+            <a:r>
+              <a:rPr lang="en-US" dirty="0"/>
+              <a:t>The model is a simplification of reality – will someone pay, will customer come, will it rain…</a:t>
+            </a:r>
+          </a:p>
+          <a:p>
+            <a:pPr lvl="1"/>
+            <a:r>
+              <a:rPr lang="en-US" dirty="0"/>
+              <a:t>Our steps are the same no matter model type we use (LR, NN, Tree…), internal math differs.</a:t>
+            </a:r>
+          </a:p>
+          <a:p>
+            <a:r>
+              <a:rPr lang="en-US" dirty="0"/>
+              <a:t>The residuals give us information on how good our model is. </a:t>
+            </a:r>
+          </a:p>
+          <a:p>
+            <a:pPr lvl="1"/>
+            <a:r>
+              <a:rPr lang="en-US" dirty="0"/>
+              <a:t>Big misses, bad model. Small misses, good model. </a:t>
+            </a:r>
+          </a:p>
+          <a:p>
+            <a:pPr lvl="1"/>
+            <a:r>
+              <a:rPr lang="en-US" dirty="0"/>
+              <a:t>We can compare different types of models to choose the most accurate. </a:t>
+            </a:r>
+          </a:p>
+          <a:p>
+            <a:r>
+              <a:rPr lang="en-US" dirty="0"/>
+              <a:t>Accuracy and reliability of the predictions…. Next time. </a:t>
+            </a:r>
+          </a:p>
+          <a:p>
+            <a:pPr lvl="1"/>
+            <a:r>
+              <a:rPr lang="en-US" dirty="0"/>
+              <a:t>Models made differently can be compared and evaluated. </a:t>
+            </a:r>
+          </a:p>
+          <a:p>
+            <a:pPr lvl="1"/>
+            <a:endParaRPr lang="en-US" dirty="0"/>
           </a:p>
         </p:txBody>
       </p:sp>
     </p:spTree>
     <p:extLst>
       <p:ext uri="{BB962C8B-B14F-4D97-AF65-F5344CB8AC3E}">
-        <p14:creationId xmlns:p14="http://schemas.microsoft.com/office/powerpoint/2010/main" val="3076179563"/>
+        <p14:creationId xmlns:p14="http://schemas.microsoft.com/office/powerpoint/2010/main" val="3713883451"/>
       </p:ext>
     </p:extLst>
   </p:cSld>
@@ -8407,6 +10330,100 @@
           <a:chExt cx="0" cy="0"/>
         </a:xfrm>
       </p:grpSpPr>
+      <p:pic>
+        <p:nvPicPr>
+          <p:cNvPr id="4" name="Graphic 3" descr="Scatter plot - Wikipedia">
+            <a:extLst>
+              <a:ext uri="{FF2B5EF4-FFF2-40B4-BE49-F238E27FC236}">
+                <a16:creationId xmlns:a16="http://schemas.microsoft.com/office/drawing/2014/main" id="{307125ED-A28F-DAFD-0DDB-648FDF085222}"/>
+              </a:ext>
+            </a:extLst>
+          </p:cNvPr>
+          <p:cNvPicPr>
+            <a:picLocks noChangeAspect="1"/>
+          </p:cNvPicPr>
+          <p:nvPr/>
+        </p:nvPicPr>
+        <p:blipFill>
+          <a:blip>
+            <a:extLst>
+              <a:ext uri="{96DAC541-7B7A-43D3-8B79-37D633B846F1}">
+                <asvg:svgBlip xmlns:asvg="http://schemas.microsoft.com/office/drawing/2016/SVG/main" r:embed="rId2"/>
+              </a:ext>
+            </a:extLst>
+          </a:blip>
+          <a:stretch>
+            <a:fillRect/>
+          </a:stretch>
+        </p:blipFill>
+        <p:spPr>
+          <a:xfrm>
+            <a:off x="1451579" y="1853754"/>
+            <a:ext cx="4169017" cy="4160185"/>
+          </a:xfrm>
+          <a:prstGeom prst="rect">
+            <a:avLst/>
+          </a:prstGeom>
+        </p:spPr>
+      </p:pic>
+      <p:sp>
+        <p:nvSpPr>
+          <p:cNvPr id="5" name="Title 4">
+            <a:extLst>
+              <a:ext uri="{FF2B5EF4-FFF2-40B4-BE49-F238E27FC236}">
+                <a16:creationId xmlns:a16="http://schemas.microsoft.com/office/drawing/2014/main" id="{4F774137-2AE8-149E-6614-404CD49883D6}"/>
+              </a:ext>
+            </a:extLst>
+          </p:cNvPr>
+          <p:cNvSpPr>
+            <a:spLocks noGrp="1"/>
+          </p:cNvSpPr>
+          <p:nvPr>
+            <p:ph type="title"/>
+          </p:nvPr>
+        </p:nvSpPr>
+        <p:spPr/>
+        <p:txBody>
+          <a:bodyPr/>
+          <a:lstStyle/>
+          <a:p>
+            <a:r>
+              <a:rPr lang="en-US" dirty="0"/>
+              <a:t>Draw a line of best fit</a:t>
+            </a:r>
+          </a:p>
+        </p:txBody>
+      </p:sp>
+    </p:spTree>
+    <p:extLst>
+      <p:ext uri="{BB962C8B-B14F-4D97-AF65-F5344CB8AC3E}">
+        <p14:creationId xmlns:p14="http://schemas.microsoft.com/office/powerpoint/2010/main" val="1198254214"/>
+      </p:ext>
+    </p:extLst>
+  </p:cSld>
+  <p:clrMapOvr>
+    <a:masterClrMapping/>
+  </p:clrMapOvr>
+</p:sld>
+</file>
+
+<file path=ppt/slides/slide5.xml><?xml version="1.0" encoding="utf-8"?>
+<p:sld xmlns:a="http://schemas.openxmlformats.org/drawingml/2006/main" xmlns:r="http://schemas.openxmlformats.org/officeDocument/2006/relationships" xmlns:p="http://schemas.openxmlformats.org/presentationml/2006/main">
+  <p:cSld>
+    <p:spTree>
+      <p:nvGrpSpPr>
+        <p:cNvPr id="1" name=""/>
+        <p:cNvGrpSpPr/>
+        <p:nvPr/>
+      </p:nvGrpSpPr>
+      <p:grpSpPr>
+        <a:xfrm>
+          <a:off x="0" y="0"/>
+          <a:ext cx="0" cy="0"/>
+          <a:chOff x="0" y="0"/>
+          <a:chExt cx="0" cy="0"/>
+        </a:xfrm>
+      </p:grpSpPr>
       <p:sp>
         <p:nvSpPr>
           <p:cNvPr id="2" name="Title 1">
@@ -8544,7 +10561,7 @@
 </p:sld>
 </file>
 
-<file path=ppt/slides/slide5.xml><?xml version="1.0" encoding="utf-8"?>
+<file path=ppt/slides/slide6.xml><?xml version="1.0" encoding="utf-8"?>
 <p:sld xmlns:a="http://schemas.openxmlformats.org/drawingml/2006/main" xmlns:r="http://schemas.openxmlformats.org/officeDocument/2006/relationships" xmlns:p="http://schemas.openxmlformats.org/presentationml/2006/main">
   <p:cSld>
     <p:spTree>
@@ -8751,7 +10768,7 @@
 </p:sld>
 </file>
 
-<file path=ppt/slides/slide6.xml><?xml version="1.0" encoding="utf-8"?>
+<file path=ppt/slides/slide7.xml><?xml version="1.0" encoding="utf-8"?>
 <p:sld xmlns:a="http://schemas.openxmlformats.org/drawingml/2006/main" xmlns:r="http://schemas.openxmlformats.org/officeDocument/2006/relationships" xmlns:p="http://schemas.openxmlformats.org/presentationml/2006/main">
   <p:cSld>
     <p:spTree>
@@ -8947,7 +10964,7 @@
 </p:sld>
 </file>
 
-<file path=ppt/slides/slide7.xml><?xml version="1.0" encoding="utf-8"?>
+<file path=ppt/slides/slide8.xml><?xml version="1.0" encoding="utf-8"?>
 <p:sld xmlns:a="http://schemas.openxmlformats.org/drawingml/2006/main" xmlns:r="http://schemas.openxmlformats.org/officeDocument/2006/relationships" xmlns:p="http://schemas.openxmlformats.org/presentationml/2006/main">
   <p:cSld>
     <p:spTree>
@@ -9218,7 +11235,7 @@
 </p:sld>
 </file>
 
-<file path=ppt/slides/slide8.xml><?xml version="1.0" encoding="utf-8"?>
+<file path=ppt/slides/slide9.xml><?xml version="1.0" encoding="utf-8"?>
 <p:sld xmlns:a="http://schemas.openxmlformats.org/drawingml/2006/main" xmlns:r="http://schemas.openxmlformats.org/officeDocument/2006/relationships" xmlns:p="http://schemas.openxmlformats.org/presentationml/2006/main">
   <p:cSld>
     <p:spTree>
@@ -9488,262 +11505,6 @@
         <p14:creationId xmlns:p14="http://schemas.microsoft.com/office/powerpoint/2010/main" val="1175916835"/>
       </p:ext>
     </p:extLst>
-  </p:cSld>
-  <p:clrMapOvr>
-    <a:masterClrMapping/>
-  </p:clrMapOvr>
-</p:sld>
-</file>
-
-<file path=ppt/slides/slide9.xml><?xml version="1.0" encoding="utf-8"?>
-<p:sld xmlns:a="http://schemas.openxmlformats.org/drawingml/2006/main" xmlns:r="http://schemas.openxmlformats.org/officeDocument/2006/relationships" xmlns:p="http://schemas.openxmlformats.org/presentationml/2006/main">
-  <p:cSld>
-    <p:spTree>
-      <p:nvGrpSpPr>
-        <p:cNvPr id="1" name="Shape 138"/>
-        <p:cNvGrpSpPr/>
-        <p:nvPr/>
-      </p:nvGrpSpPr>
-      <p:grpSpPr>
-        <a:xfrm>
-          <a:off x="0" y="0"/>
-          <a:ext cx="0" cy="0"/>
-          <a:chOff x="0" y="0"/>
-          <a:chExt cx="0" cy="0"/>
-        </a:xfrm>
-      </p:grpSpPr>
-      <p:sp>
-        <p:nvSpPr>
-          <p:cNvPr id="139" name="Google Shape;139;p28"/>
-          <p:cNvSpPr txBox="1">
-            <a:spLocks noGrp="1"/>
-          </p:cNvSpPr>
-          <p:nvPr>
-            <p:ph type="title"/>
-          </p:nvPr>
-        </p:nvSpPr>
-        <p:spPr>
-          <a:prstGeom prst="rect">
-            <a:avLst/>
-          </a:prstGeom>
-        </p:spPr>
-        <p:txBody>
-          <a:bodyPr spcFirstLastPara="1" vert="horz" wrap="square" lIns="91425" tIns="91425" rIns="91425" bIns="91425" rtlCol="0" anchor="b" anchorCtr="0">
-            <a:noAutofit/>
-          </a:bodyPr>
-          <a:lstStyle/>
-          <a:p>
-            <a:r>
-              <a:rPr lang="en">
-                <a:solidFill>
-                  <a:schemeClr val="accent1"/>
-                </a:solidFill>
-              </a:rPr>
-              <a:t>Residuals</a:t>
-            </a:r>
-            <a:endParaRPr baseline="30000">
-              <a:solidFill>
-                <a:schemeClr val="accent1"/>
-              </a:solidFill>
-            </a:endParaRPr>
-          </a:p>
-        </p:txBody>
-      </p:sp>
-      <p:sp>
-        <p:nvSpPr>
-          <p:cNvPr id="140" name="Google Shape;140;p28"/>
-          <p:cNvSpPr txBox="1">
-            <a:spLocks noGrp="1"/>
-          </p:cNvSpPr>
-          <p:nvPr>
-            <p:ph idx="1"/>
-          </p:nvPr>
-        </p:nvSpPr>
-        <p:spPr>
-          <a:xfrm>
-            <a:off x="0" y="2015732"/>
-            <a:ext cx="7644383" cy="4153420"/>
-          </a:xfrm>
-          <a:prstGeom prst="rect">
-            <a:avLst/>
-          </a:prstGeom>
-        </p:spPr>
-        <p:txBody>
-          <a:bodyPr spcFirstLastPara="1" vert="horz" wrap="square" lIns="91425" tIns="91425" rIns="91425" bIns="91425" rtlCol="0" anchor="t" anchorCtr="0">
-            <a:noAutofit/>
-          </a:bodyPr>
-          <a:lstStyle/>
-          <a:p>
-            <a:pPr marL="342900" indent="-342900">
-              <a:lnSpc>
-                <a:spcPct val="115000"/>
-              </a:lnSpc>
-              <a:spcBef>
-                <a:spcPts val="0"/>
-              </a:spcBef>
-            </a:pPr>
-            <a:r>
-              <a:rPr lang="en" sz="2200" b="1" dirty="0"/>
-              <a:t>Residuals</a:t>
-            </a:r>
-            <a:r>
-              <a:rPr lang="en" sz="2200" dirty="0"/>
-              <a:t> are the leftovers from the model fit.</a:t>
-            </a:r>
-          </a:p>
-          <a:p>
-            <a:pPr marL="800100" lvl="1" indent="-342900">
-              <a:lnSpc>
-                <a:spcPct val="115000"/>
-              </a:lnSpc>
-            </a:pPr>
-            <a:r>
-              <a:rPr lang="en" sz="2000" dirty="0"/>
-              <a:t>Data = Fit + Residual</a:t>
-            </a:r>
-          </a:p>
-          <a:p>
-            <a:pPr marL="342900" indent="-342900">
-              <a:lnSpc>
-                <a:spcPct val="115000"/>
-              </a:lnSpc>
-            </a:pPr>
-            <a:r>
-              <a:rPr lang="en" sz="2200" dirty="0"/>
-              <a:t>Larger residuals means the model differs from the data. </a:t>
-            </a:r>
-          </a:p>
-          <a:p>
-            <a:pPr marL="342900" indent="-342900">
-              <a:lnSpc>
-                <a:spcPct val="115000"/>
-              </a:lnSpc>
-            </a:pPr>
-            <a:r>
-              <a:rPr lang="en" sz="2200" dirty="0"/>
-              <a:t>Residuals can be totaled then compared. </a:t>
-            </a:r>
-          </a:p>
-          <a:p>
-            <a:pPr marL="342900" indent="-342900">
-              <a:lnSpc>
-                <a:spcPct val="115000"/>
-              </a:lnSpc>
-            </a:pPr>
-            <a:r>
-              <a:rPr lang="en" sz="2200" dirty="0"/>
-              <a:t>We can also phrase it as t</a:t>
-            </a:r>
-            <a:r>
-              <a:rPr lang="en-CA" sz="2200" dirty="0"/>
-              <a:t>he</a:t>
-            </a:r>
-            <a:r>
-              <a:rPr lang="en" sz="2200" dirty="0"/>
-              <a:t> variance in y that isn’t explained by the model. </a:t>
-            </a:r>
-          </a:p>
-          <a:p>
-            <a:pPr marL="800100" lvl="1" indent="-342900">
-              <a:lnSpc>
-                <a:spcPct val="115000"/>
-              </a:lnSpc>
-            </a:pPr>
-            <a:r>
-              <a:rPr lang="en" sz="2000" dirty="0"/>
-              <a:t>Model explains part of why Y values are what they are. </a:t>
-            </a:r>
-          </a:p>
-          <a:p>
-            <a:pPr marL="800100" lvl="1" indent="-342900">
-              <a:lnSpc>
-                <a:spcPct val="115000"/>
-              </a:lnSpc>
-            </a:pPr>
-            <a:r>
-              <a:rPr lang="en" sz="2000" dirty="0"/>
-              <a:t>Residuals is the amount of why that the model doesn’t capture. </a:t>
-            </a:r>
-          </a:p>
-          <a:p>
-            <a:pPr marL="342900" indent="-342900">
-              <a:lnSpc>
-                <a:spcPct val="115000"/>
-              </a:lnSpc>
-            </a:pPr>
-            <a:endParaRPr sz="2200" dirty="0"/>
-          </a:p>
-          <a:p>
-            <a:pPr marL="0" indent="0">
-              <a:lnSpc>
-                <a:spcPct val="115000"/>
-              </a:lnSpc>
-              <a:spcBef>
-                <a:spcPts val="0"/>
-              </a:spcBef>
-              <a:buClr>
-                <a:schemeClr val="dk1"/>
-              </a:buClr>
-              <a:buSzPts val="1100"/>
-              <a:buNone/>
-            </a:pPr>
-            <a:endParaRPr sz="2200" dirty="0"/>
-          </a:p>
-          <a:p>
-            <a:pPr marL="0" indent="0">
-              <a:lnSpc>
-                <a:spcPct val="115000"/>
-              </a:lnSpc>
-              <a:spcBef>
-                <a:spcPts val="0"/>
-              </a:spcBef>
-              <a:buNone/>
-            </a:pPr>
-            <a:endParaRPr sz="2200" dirty="0"/>
-          </a:p>
-          <a:p>
-            <a:pPr marL="0" indent="0">
-              <a:lnSpc>
-                <a:spcPct val="115000"/>
-              </a:lnSpc>
-              <a:spcBef>
-                <a:spcPts val="0"/>
-              </a:spcBef>
-              <a:buNone/>
-            </a:pPr>
-            <a:endParaRPr sz="2200" dirty="0"/>
-          </a:p>
-        </p:txBody>
-      </p:sp>
-      <p:pic>
-        <p:nvPicPr>
-          <p:cNvPr id="141" name="Google Shape;141;p28"/>
-          <p:cNvPicPr preferRelativeResize="0"/>
-          <p:nvPr/>
-        </p:nvPicPr>
-        <p:blipFill>
-          <a:blip r:embed="rId3">
-            <a:alphaModFix/>
-          </a:blip>
-          <a:stretch>
-            <a:fillRect/>
-          </a:stretch>
-        </p:blipFill>
-        <p:spPr>
-          <a:xfrm>
-            <a:off x="7644384" y="1853755"/>
-            <a:ext cx="4547616" cy="3864294"/>
-          </a:xfrm>
-          <a:prstGeom prst="rect">
-            <a:avLst/>
-          </a:prstGeom>
-          <a:noFill/>
-          <a:ln>
-            <a:noFill/>
-          </a:ln>
-        </p:spPr>
-      </p:pic>
-    </p:spTree>
   </p:cSld>
   <p:clrMapOvr>
     <a:masterClrMapping/>

--- a/reference_material/slides/020_Linear_Least_Squares.pptx
+++ b/reference_material/slides/020_Linear_Least_Squares.pptx
@@ -5,7 +5,7 @@
     <p:sldMasterId id="2147483660" r:id="rId1"/>
   </p:sldMasterIdLst>
   <p:notesMasterIdLst>
-    <p:notesMasterId r:id="rId38"/>
+    <p:notesMasterId r:id="rId39"/>
   </p:notesMasterIdLst>
   <p:sldIdLst>
     <p:sldId id="282" r:id="rId2"/>
@@ -40,10 +40,11 @@
     <p:sldId id="297" r:id="rId31"/>
     <p:sldId id="279" r:id="rId32"/>
     <p:sldId id="280" r:id="rId33"/>
-    <p:sldId id="285" r:id="rId34"/>
-    <p:sldId id="298" r:id="rId35"/>
-    <p:sldId id="300" r:id="rId36"/>
-    <p:sldId id="281" r:id="rId37"/>
+    <p:sldId id="302" r:id="rId34"/>
+    <p:sldId id="285" r:id="rId35"/>
+    <p:sldId id="298" r:id="rId36"/>
+    <p:sldId id="300" r:id="rId37"/>
+    <p:sldId id="281" r:id="rId38"/>
   </p:sldIdLst>
   <p:sldSz cx="12192000" cy="6858000"/>
   <p:notesSz cx="6858000" cy="9144000"/>
@@ -5131,8 +5132,8 @@
         </p:nvSpPr>
         <p:spPr>
           <a:xfrm>
-            <a:off x="1451579" y="1929284"/>
-            <a:ext cx="9603275" cy="4124197"/>
+            <a:off x="1451579" y="1853754"/>
+            <a:ext cx="9603275" cy="4199727"/>
           </a:xfrm>
         </p:spPr>
         <p:txBody>
@@ -5218,10 +5219,16 @@
             </a:r>
           </a:p>
           <a:p>
+            <a:r>
+              <a:rPr lang="en-US" dirty="0"/>
+              <a:t> If it doesn’t make sense, please ask. We use it non-stop.</a:t>
+            </a:r>
+          </a:p>
+          <a:p>
             <a:pPr lvl="1"/>
             <a:r>
               <a:rPr lang="en-US" dirty="0"/>
-              <a:t>If the sklearn stuff especially doesn’t make sense, please ask. We use it non-stop.</a:t>
+              <a:t>Sklearn and data structure parts especially. </a:t>
             </a:r>
           </a:p>
         </p:txBody>
@@ -5242,6 +5249,30 @@
 <file path=ppt/slides/slide10.xml><?xml version="1.0" encoding="utf-8"?>
 <p:sld xmlns:a="http://schemas.openxmlformats.org/drawingml/2006/main" xmlns:r="http://schemas.openxmlformats.org/officeDocument/2006/relationships" xmlns:p="http://schemas.openxmlformats.org/presentationml/2006/main">
   <p:cSld>
+    <p:bg>
+      <p:bgPr>
+        <a:gradFill rotWithShape="1">
+          <a:gsLst>
+            <a:gs pos="0">
+              <a:schemeClr val="bg2">
+                <a:tint val="94000"/>
+                <a:satMod val="80000"/>
+                <a:lumMod val="106000"/>
+              </a:schemeClr>
+            </a:gs>
+            <a:gs pos="100000">
+              <a:schemeClr val="bg2">
+                <a:shade val="80000"/>
+              </a:schemeClr>
+            </a:gs>
+          </a:gsLst>
+          <a:path path="circle">
+            <a:fillToRect l="43000" r="43000" b="100000"/>
+          </a:path>
+        </a:gradFill>
+        <a:effectLst/>
+      </p:bgPr>
+    </p:bg>
     <p:spTree>
       <p:nvGrpSpPr>
         <p:cNvPr id="1" name="Shape 138"/>
@@ -5267,29 +5298,25 @@
           </p:nvPr>
         </p:nvSpPr>
         <p:spPr>
+          <a:xfrm>
+            <a:off x="1451579" y="804519"/>
+            <a:ext cx="9603275" cy="1049235"/>
+          </a:xfrm>
           <a:prstGeom prst="rect">
             <a:avLst/>
           </a:prstGeom>
         </p:spPr>
         <p:txBody>
-          <a:bodyPr spcFirstLastPara="1" vert="horz" wrap="square" lIns="91425" tIns="91425" rIns="91425" bIns="91425" rtlCol="0" anchor="b" anchorCtr="0">
-            <a:noAutofit/>
+          <a:bodyPr spcFirstLastPara="1" vert="horz" lIns="91425" tIns="91425" rIns="91425" bIns="91425" rtlCol="0" anchorCtr="0">
+            <a:normAutofit/>
           </a:bodyPr>
           <a:lstStyle/>
           <a:p>
             <a:r>
-              <a:rPr lang="en">
-                <a:solidFill>
-                  <a:schemeClr val="accent1"/>
-                </a:solidFill>
-              </a:rPr>
+              <a:rPr lang="en-CA"/>
               <a:t>Residuals</a:t>
             </a:r>
-            <a:endParaRPr baseline="30000">
-              <a:solidFill>
-                <a:schemeClr val="accent1"/>
-              </a:solidFill>
-            </a:endParaRPr>
+            <a:endParaRPr lang="en-CA" baseline="30000"/>
           </a:p>
         </p:txBody>
       </p:sp>
@@ -5305,122 +5332,114 @@
         </p:nvSpPr>
         <p:spPr>
           <a:xfrm>
-            <a:off x="0" y="2015732"/>
-            <a:ext cx="7644383" cy="4153420"/>
+            <a:off x="1451579" y="2015734"/>
+            <a:ext cx="4882396" cy="4037747"/>
           </a:xfrm>
           <a:prstGeom prst="rect">
             <a:avLst/>
           </a:prstGeom>
         </p:spPr>
         <p:txBody>
-          <a:bodyPr spcFirstLastPara="1" vert="horz" wrap="square" lIns="91425" tIns="91425" rIns="91425" bIns="91425" rtlCol="0" anchor="t" anchorCtr="0">
-            <a:noAutofit/>
+          <a:bodyPr spcFirstLastPara="1" vert="horz" lIns="91425" tIns="91425" rIns="91425" bIns="91425" rtlCol="0" anchorCtr="0">
+            <a:normAutofit fontScale="92500"/>
           </a:bodyPr>
           <a:lstStyle/>
           <a:p>
             <a:pPr marL="342900" indent="-342900">
               <a:lnSpc>
-                <a:spcPct val="115000"/>
+                <a:spcPct val="110000"/>
               </a:lnSpc>
               <a:spcBef>
                 <a:spcPts val="0"/>
               </a:spcBef>
             </a:pPr>
             <a:r>
-              <a:rPr lang="en" sz="2200" b="1" dirty="0"/>
+              <a:rPr lang="en-CA" sz="1800" b="1" dirty="0"/>
               <a:t>Residuals</a:t>
             </a:r>
             <a:r>
-              <a:rPr lang="en" sz="2200" dirty="0"/>
+              <a:rPr lang="en-CA" sz="1800" dirty="0"/>
               <a:t> are the leftovers from the model fit.</a:t>
             </a:r>
           </a:p>
           <a:p>
             <a:pPr marL="800100" lvl="1" indent="-342900">
               <a:lnSpc>
-                <a:spcPct val="115000"/>
+                <a:spcPct val="110000"/>
               </a:lnSpc>
             </a:pPr>
             <a:r>
-              <a:rPr lang="en" sz="2000" dirty="0"/>
+              <a:rPr lang="en-CA" dirty="0"/>
               <a:t>Data = Fit + Residual</a:t>
             </a:r>
           </a:p>
           <a:p>
             <a:pPr marL="342900" indent="-342900">
               <a:lnSpc>
-                <a:spcPct val="115000"/>
+                <a:spcPct val="110000"/>
               </a:lnSpc>
             </a:pPr>
             <a:r>
-              <a:rPr lang="en" sz="2200" dirty="0"/>
+              <a:rPr lang="en-CA" sz="1800" dirty="0"/>
               <a:t>Larger residuals means the model differs from the data. </a:t>
             </a:r>
           </a:p>
           <a:p>
             <a:pPr marL="342900" indent="-342900">
               <a:lnSpc>
-                <a:spcPct val="115000"/>
+                <a:spcPct val="110000"/>
               </a:lnSpc>
             </a:pPr>
             <a:r>
-              <a:rPr lang="en" sz="2200" dirty="0"/>
+              <a:rPr lang="en-CA" sz="1800" dirty="0"/>
               <a:t>Residuals can be totaled then compared. </a:t>
             </a:r>
           </a:p>
           <a:p>
             <a:pPr marL="342900" indent="-342900">
               <a:lnSpc>
-                <a:spcPct val="115000"/>
+                <a:spcPct val="110000"/>
               </a:lnSpc>
             </a:pPr>
             <a:r>
-              <a:rPr lang="en" sz="2200" dirty="0"/>
-              <a:t>We can also phrase it as t</a:t>
-            </a:r>
-            <a:r>
-              <a:rPr lang="en-CA" sz="2200" dirty="0"/>
-              <a:t>he</a:t>
-            </a:r>
-            <a:r>
-              <a:rPr lang="en" sz="2200" dirty="0"/>
-              <a:t> variance in y that isn’t explained by the model. </a:t>
+              <a:rPr lang="en-CA" sz="1800" dirty="0"/>
+              <a:t>We can also phrase it as the variance in y that isn’t explained by the model. </a:t>
             </a:r>
           </a:p>
           <a:p>
             <a:pPr marL="800100" lvl="1" indent="-342900">
               <a:lnSpc>
-                <a:spcPct val="115000"/>
+                <a:spcPct val="110000"/>
               </a:lnSpc>
             </a:pPr>
             <a:r>
-              <a:rPr lang="en" sz="2000" dirty="0"/>
+              <a:rPr lang="en-CA" dirty="0"/>
               <a:t>Model explains part of why Y values are what they are. </a:t>
             </a:r>
           </a:p>
           <a:p>
             <a:pPr marL="800100" lvl="1" indent="-342900">
               <a:lnSpc>
-                <a:spcPct val="115000"/>
+                <a:spcPct val="110000"/>
               </a:lnSpc>
             </a:pPr>
             <a:r>
-              <a:rPr lang="en" sz="2000" dirty="0"/>
+              <a:rPr lang="en-CA" dirty="0"/>
               <a:t>Residuals is the amount of why that the model doesn’t capture. </a:t>
             </a:r>
           </a:p>
           <a:p>
             <a:pPr marL="342900" indent="-342900">
               <a:lnSpc>
-                <a:spcPct val="115000"/>
+                <a:spcPct val="110000"/>
               </a:lnSpc>
             </a:pPr>
-            <a:endParaRPr sz="2200" dirty="0"/>
+            <a:endParaRPr lang="en-CA" sz="1800" dirty="0"/>
           </a:p>
           <a:p>
             <a:pPr marL="0" indent="0">
               <a:lnSpc>
-                <a:spcPct val="115000"/>
+                <a:spcPct val="110000"/>
               </a:lnSpc>
               <a:spcBef>
                 <a:spcPts val="0"/>
@@ -5431,31 +5450,31 @@
               <a:buSzPts val="1100"/>
               <a:buNone/>
             </a:pPr>
-            <a:endParaRPr sz="2200" dirty="0"/>
+            <a:endParaRPr lang="en-CA" sz="1800" dirty="0"/>
           </a:p>
           <a:p>
             <a:pPr marL="0" indent="0">
               <a:lnSpc>
-                <a:spcPct val="115000"/>
+                <a:spcPct val="110000"/>
               </a:lnSpc>
               <a:spcBef>
                 <a:spcPts val="0"/>
               </a:spcBef>
               <a:buNone/>
             </a:pPr>
-            <a:endParaRPr sz="2200" dirty="0"/>
+            <a:endParaRPr lang="en-CA" sz="1800" dirty="0"/>
           </a:p>
           <a:p>
             <a:pPr marL="0" indent="0">
               <a:lnSpc>
-                <a:spcPct val="115000"/>
+                <a:spcPct val="110000"/>
               </a:lnSpc>
               <a:spcBef>
                 <a:spcPts val="0"/>
               </a:spcBef>
               <a:buNone/>
             </a:pPr>
-            <a:endParaRPr sz="2200" dirty="0"/>
+            <a:endParaRPr lang="en-CA" sz="1800" dirty="0"/>
           </a:p>
         </p:txBody>
       </p:sp>
@@ -5466,25 +5485,20 @@
           <p:nvPr/>
         </p:nvPicPr>
         <p:blipFill>
-          <a:blip r:embed="rId3">
-            <a:alphaModFix/>
-          </a:blip>
+          <a:blip r:embed="rId3"/>
           <a:stretch>
             <a:fillRect/>
           </a:stretch>
         </p:blipFill>
         <p:spPr>
           <a:xfrm>
-            <a:off x="7644384" y="1853755"/>
-            <a:ext cx="4547616" cy="3864294"/>
+            <a:off x="6333975" y="2015734"/>
+            <a:ext cx="4481315" cy="3450613"/>
           </a:xfrm>
           <a:prstGeom prst="rect">
             <a:avLst/>
           </a:prstGeom>
           <a:noFill/>
-          <a:ln>
-            <a:noFill/>
-          </a:ln>
         </p:spPr>
       </p:pic>
     </p:spTree>
@@ -5588,25 +5602,115 @@
               <a:buNone/>
             </a:pPr>
             <a:r>
+              <a:rPr lang="en" sz="2200" dirty="0"/>
+              <a:t>Residual is the difference between the observed (</a:t>
+            </a:r>
+            <a:r>
+              <a:rPr lang="en" sz="2200" dirty="0" err="1"/>
+              <a:t>y</a:t>
+            </a:r>
+            <a:r>
+              <a:rPr lang="en" sz="2200" baseline="-25000" dirty="0" err="1"/>
+              <a:t>i</a:t>
+            </a:r>
+            <a:r>
+              <a:rPr lang="en" sz="2200" dirty="0"/>
+              <a:t>) and predicted </a:t>
+            </a:r>
+            <a:r>
+              <a:rPr lang="en" sz="2200" dirty="0" err="1"/>
+              <a:t>ŷ</a:t>
+            </a:r>
+            <a:r>
+              <a:rPr lang="en" sz="2200" baseline="-25000" dirty="0" err="1"/>
+              <a:t>i</a:t>
+            </a:r>
+            <a:r>
+              <a:rPr lang="en" sz="2200" dirty="0"/>
+              <a:t>.</a:t>
+            </a:r>
+            <a:endParaRPr sz="2200" dirty="0"/>
+          </a:p>
+        </p:txBody>
+      </p:sp>
+      <p:sp>
+        <p:nvSpPr>
+          <p:cNvPr id="167" name="Google Shape;167;p31"/>
+          <p:cNvSpPr txBox="1">
+            <a:spLocks noGrp="1"/>
+          </p:cNvSpPr>
+          <p:nvPr>
+            <p:ph type="body" idx="4294967295"/>
+          </p:nvPr>
+        </p:nvSpPr>
+        <p:spPr>
+          <a:xfrm flipH="1">
+            <a:off x="9417050" y="2792413"/>
+            <a:ext cx="2774950" cy="3141662"/>
+          </a:xfrm>
+          <a:prstGeom prst="rect">
+            <a:avLst/>
+          </a:prstGeom>
+        </p:spPr>
+        <p:txBody>
+          <a:bodyPr spcFirstLastPara="1" vert="horz" wrap="square" lIns="91425" tIns="91425" rIns="91425" bIns="91425" rtlCol="0" anchor="t" anchorCtr="0">
+            <a:noAutofit/>
+          </a:bodyPr>
+          <a:lstStyle/>
+          <a:p>
+            <a:pPr marL="0" indent="0">
+              <a:lnSpc>
+                <a:spcPct val="115000"/>
+              </a:lnSpc>
+              <a:spcBef>
+                <a:spcPts val="0"/>
+              </a:spcBef>
+              <a:buNone/>
+            </a:pPr>
+            <a:r>
               <a:rPr lang="en" sz="2200"/>
-              <a:t>Residual is the difference between the observed (y</a:t>
-            </a:r>
-            <a:r>
-              <a:rPr lang="en" sz="2200" baseline="-25000"/>
-              <a:t>i</a:t>
-            </a:r>
+              <a:t>% living in poverty in DC is 5.44% more than predicted.</a:t>
+            </a:r>
+            <a:endParaRPr sz="2200"/>
+          </a:p>
+          <a:p>
+            <a:pPr marL="0" indent="0">
+              <a:lnSpc>
+                <a:spcPct val="115000"/>
+              </a:lnSpc>
+              <a:spcBef>
+                <a:spcPts val="0"/>
+              </a:spcBef>
+              <a:buNone/>
+            </a:pPr>
+            <a:endParaRPr sz="2200"/>
+          </a:p>
+          <a:p>
+            <a:pPr marL="0" indent="0">
+              <a:lnSpc>
+                <a:spcPct val="115000"/>
+              </a:lnSpc>
+              <a:spcBef>
+                <a:spcPts val="0"/>
+              </a:spcBef>
+              <a:buNone/>
+            </a:pPr>
             <a:r>
               <a:rPr lang="en" sz="2200"/>
-              <a:t>) and predicted ŷ</a:t>
-            </a:r>
-            <a:r>
-              <a:rPr lang="en" sz="2200" baseline="-25000"/>
-              <a:t>i</a:t>
-            </a:r>
-            <a:r>
-              <a:rPr lang="en" sz="2200"/>
-              <a:t>.</a:t>
-            </a:r>
+              <a:t>% living in poverty in RI is 4.16% less than predicted.</a:t>
+            </a:r>
+            <a:endParaRPr sz="2200"/>
+          </a:p>
+          <a:p>
+            <a:pPr marL="0" indent="0">
+              <a:lnSpc>
+                <a:spcPct val="115000"/>
+              </a:lnSpc>
+              <a:spcBef>
+                <a:spcPts val="0"/>
+              </a:spcBef>
+              <a:buNone/>
+            </a:pPr>
             <a:endParaRPr sz="2200"/>
           </a:p>
         </p:txBody>
@@ -5667,88 +5771,6 @@
           </a:ln>
         </p:spPr>
       </p:pic>
-      <p:sp>
-        <p:nvSpPr>
-          <p:cNvPr id="167" name="Google Shape;167;p31"/>
-          <p:cNvSpPr txBox="1">
-            <a:spLocks noGrp="1"/>
-          </p:cNvSpPr>
-          <p:nvPr>
-            <p:ph type="body" idx="1"/>
-          </p:nvPr>
-        </p:nvSpPr>
-        <p:spPr>
-          <a:xfrm flipH="1">
-            <a:off x="7082050" y="2793025"/>
-            <a:ext cx="2774700" cy="3140700"/>
-          </a:xfrm>
-          <a:prstGeom prst="rect">
-            <a:avLst/>
-          </a:prstGeom>
-        </p:spPr>
-        <p:txBody>
-          <a:bodyPr spcFirstLastPara="1" vert="horz" wrap="square" lIns="91425" tIns="91425" rIns="91425" bIns="91425" rtlCol="0" anchor="t" anchorCtr="0">
-            <a:noAutofit/>
-          </a:bodyPr>
-          <a:lstStyle/>
-          <a:p>
-            <a:pPr marL="0" indent="0">
-              <a:lnSpc>
-                <a:spcPct val="115000"/>
-              </a:lnSpc>
-              <a:spcBef>
-                <a:spcPts val="0"/>
-              </a:spcBef>
-              <a:buNone/>
-            </a:pPr>
-            <a:r>
-              <a:rPr lang="en" sz="2200"/>
-              <a:t>% living in poverty in DC is 5.44% more than predicted.</a:t>
-            </a:r>
-            <a:endParaRPr sz="2200"/>
-          </a:p>
-          <a:p>
-            <a:pPr marL="0" indent="0">
-              <a:lnSpc>
-                <a:spcPct val="115000"/>
-              </a:lnSpc>
-              <a:spcBef>
-                <a:spcPts val="0"/>
-              </a:spcBef>
-              <a:buNone/>
-            </a:pPr>
-            <a:endParaRPr sz="2200"/>
-          </a:p>
-          <a:p>
-            <a:pPr marL="0" indent="0">
-              <a:lnSpc>
-                <a:spcPct val="115000"/>
-              </a:lnSpc>
-              <a:spcBef>
-                <a:spcPts val="0"/>
-              </a:spcBef>
-              <a:buNone/>
-            </a:pPr>
-            <a:r>
-              <a:rPr lang="en" sz="2200"/>
-              <a:t>% living in poverty in RI is 4.16% less than predicted.</a:t>
-            </a:r>
-            <a:endParaRPr sz="2200"/>
-          </a:p>
-          <a:p>
-            <a:pPr marL="0" indent="0">
-              <a:lnSpc>
-                <a:spcPct val="115000"/>
-              </a:lnSpc>
-              <a:spcBef>
-                <a:spcPts val="0"/>
-              </a:spcBef>
-              <a:buNone/>
-            </a:pPr>
-            <a:endParaRPr sz="2200"/>
-          </a:p>
-        </p:txBody>
-      </p:sp>
     </p:spTree>
   </p:cSld>
   <p:clrMapOvr>
@@ -6496,12 +6518,7 @@
             <p:ph type="title"/>
           </p:nvPr>
         </p:nvSpPr>
-        <p:spPr>
-          <a:xfrm>
-            <a:off x="1451579" y="804519"/>
-            <a:ext cx="9603275" cy="1049235"/>
-          </a:xfrm>
-        </p:spPr>
+        <p:spPr/>
         <p:txBody>
           <a:bodyPr>
             <a:normAutofit/>
@@ -7002,6 +7019,47 @@
       </p:grpSpPr>
       <p:sp>
         <p:nvSpPr>
+          <p:cNvPr id="112" name="Google Shape;112;p24"/>
+          <p:cNvSpPr txBox="1">
+            <a:spLocks noGrp="1"/>
+          </p:cNvSpPr>
+          <p:nvPr>
+            <p:ph type="title"/>
+          </p:nvPr>
+        </p:nvSpPr>
+        <p:spPr>
+          <a:xfrm>
+            <a:off x="1981200" y="-12"/>
+            <a:ext cx="8229600" cy="1143000"/>
+          </a:xfrm>
+          <a:prstGeom prst="rect">
+            <a:avLst/>
+          </a:prstGeom>
+        </p:spPr>
+        <p:txBody>
+          <a:bodyPr spcFirstLastPara="1" vert="horz" wrap="square" lIns="91425" tIns="91425" rIns="91425" bIns="91425" rtlCol="0" anchor="b" anchorCtr="0">
+            <a:noAutofit/>
+          </a:bodyPr>
+          <a:lstStyle/>
+          <a:p>
+            <a:r>
+              <a:rPr lang="en">
+                <a:solidFill>
+                  <a:schemeClr val="accent1"/>
+                </a:solidFill>
+              </a:rPr>
+              <a:t>Poverty vs. HS graduate rate</a:t>
+            </a:r>
+            <a:endParaRPr baseline="30000">
+              <a:solidFill>
+                <a:schemeClr val="accent1"/>
+              </a:solidFill>
+            </a:endParaRPr>
+          </a:p>
+        </p:txBody>
+      </p:sp>
+      <p:sp>
+        <p:nvSpPr>
           <p:cNvPr id="111" name="Google Shape;111;p24"/>
           <p:cNvSpPr txBox="1">
             <a:spLocks noGrp="1"/>
@@ -7126,47 +7184,6 @@
               <a:t>. </a:t>
             </a:r>
             <a:endParaRPr sz="2200" dirty="0"/>
-          </a:p>
-        </p:txBody>
-      </p:sp>
-      <p:sp>
-        <p:nvSpPr>
-          <p:cNvPr id="112" name="Google Shape;112;p24"/>
-          <p:cNvSpPr txBox="1">
-            <a:spLocks noGrp="1"/>
-          </p:cNvSpPr>
-          <p:nvPr>
-            <p:ph type="title"/>
-          </p:nvPr>
-        </p:nvSpPr>
-        <p:spPr>
-          <a:xfrm>
-            <a:off x="1981200" y="-12"/>
-            <a:ext cx="8229600" cy="1143000"/>
-          </a:xfrm>
-          <a:prstGeom prst="rect">
-            <a:avLst/>
-          </a:prstGeom>
-        </p:spPr>
-        <p:txBody>
-          <a:bodyPr spcFirstLastPara="1" vert="horz" wrap="square" lIns="91425" tIns="91425" rIns="91425" bIns="91425" rtlCol="0" anchor="b" anchorCtr="0">
-            <a:noAutofit/>
-          </a:bodyPr>
-          <a:lstStyle/>
-          <a:p>
-            <a:r>
-              <a:rPr lang="en">
-                <a:solidFill>
-                  <a:schemeClr val="accent1"/>
-                </a:solidFill>
-              </a:rPr>
-              <a:t>Poverty vs. HS graduate rate</a:t>
-            </a:r>
-            <a:endParaRPr baseline="30000">
-              <a:solidFill>
-                <a:schemeClr val="accent1"/>
-              </a:solidFill>
-            </a:endParaRPr>
           </a:p>
         </p:txBody>
       </p:sp>
@@ -8224,12 +8241,7 @@
             <p:ph type="title"/>
           </p:nvPr>
         </p:nvSpPr>
-        <p:spPr>
-          <a:xfrm>
-            <a:off x="1451579" y="804519"/>
-            <a:ext cx="9603275" cy="1049235"/>
-          </a:xfrm>
-        </p:spPr>
+        <p:spPr/>
         <p:txBody>
           <a:bodyPr>
             <a:normAutofit/>
@@ -8417,12 +8429,7 @@
             <p:ph type="title"/>
           </p:nvPr>
         </p:nvSpPr>
-        <p:spPr>
-          <a:xfrm>
-            <a:off x="1451579" y="804519"/>
-            <a:ext cx="9603275" cy="1049235"/>
-          </a:xfrm>
-        </p:spPr>
+        <p:spPr/>
         <p:txBody>
           <a:bodyPr>
             <a:normAutofit/>
@@ -8682,13 +8689,8 @@
           <a:p>
             <a:r>
               <a:rPr lang="en-US" dirty="0"/>
-              <a:t>This concept exists across all models, but harder </a:t>
-            </a:r>
-            <a:r>
-              <a:rPr lang="en-US"/>
-              <a:t>to picture. </a:t>
-            </a:r>
-            <a:endParaRPr lang="en-US" dirty="0"/>
+              <a:t>This concept exists across all models, but harder to picture. </a:t>
+            </a:r>
           </a:p>
           <a:p>
             <a:pPr lvl="1"/>
@@ -9510,12 +9512,7 @@
             <p:ph type="title"/>
           </p:nvPr>
         </p:nvSpPr>
-        <p:spPr>
-          <a:xfrm>
-            <a:off x="1451579" y="804519"/>
-            <a:ext cx="9603275" cy="1049235"/>
-          </a:xfrm>
-        </p:spPr>
+        <p:spPr/>
         <p:txBody>
           <a:bodyPr>
             <a:normAutofit/>
@@ -9771,6 +9768,164 @@
           <p:cNvPr id="2" name="Title 1">
             <a:extLst>
               <a:ext uri="{FF2B5EF4-FFF2-40B4-BE49-F238E27FC236}">
+                <a16:creationId xmlns:a16="http://schemas.microsoft.com/office/drawing/2014/main" id="{6B816EFE-DFDC-95A9-6A58-147B03C6F388}"/>
+              </a:ext>
+            </a:extLst>
+          </p:cNvPr>
+          <p:cNvSpPr>
+            <a:spLocks noGrp="1"/>
+          </p:cNvSpPr>
+          <p:nvPr>
+            <p:ph type="title"/>
+          </p:nvPr>
+        </p:nvSpPr>
+        <p:spPr/>
+        <p:txBody>
+          <a:bodyPr/>
+          <a:lstStyle/>
+          <a:p>
+            <a:r>
+              <a:rPr lang="en-US" dirty="0"/>
+              <a:t>Add Some More D</a:t>
+            </a:r>
+          </a:p>
+        </p:txBody>
+      </p:sp>
+      <p:sp>
+        <p:nvSpPr>
+          <p:cNvPr id="3" name="Content Placeholder 2">
+            <a:extLst>
+              <a:ext uri="{FF2B5EF4-FFF2-40B4-BE49-F238E27FC236}">
+                <a16:creationId xmlns:a16="http://schemas.microsoft.com/office/drawing/2014/main" id="{97B86D47-A94F-5B56-23C0-53A134FB5AB7}"/>
+              </a:ext>
+            </a:extLst>
+          </p:cNvPr>
+          <p:cNvSpPr>
+            <a:spLocks noGrp="1"/>
+          </p:cNvSpPr>
+          <p:nvPr>
+            <p:ph idx="1"/>
+          </p:nvPr>
+        </p:nvSpPr>
+        <p:spPr>
+          <a:xfrm>
+            <a:off x="127225" y="2015732"/>
+            <a:ext cx="6125991" cy="3450613"/>
+          </a:xfrm>
+        </p:spPr>
+        <p:txBody>
+          <a:bodyPr/>
+          <a:lstStyle/>
+          <a:p>
+            <a:r>
+              <a:rPr lang="en-US" dirty="0"/>
+              <a:t>Regression models with higher dimensionality are called multiple regression. </a:t>
+            </a:r>
+          </a:p>
+          <a:p>
+            <a:r>
+              <a:rPr lang="en-US" dirty="0"/>
+              <a:t>We can have an arbitrary number of inputs. </a:t>
+            </a:r>
+          </a:p>
+          <a:p>
+            <a:r>
+              <a:rPr lang="en-US" dirty="0"/>
+              <a:t>All concepts are identical, but it is hard to visualize. </a:t>
+            </a:r>
+          </a:p>
+          <a:p>
+            <a:pPr lvl="1"/>
+            <a:r>
+              <a:rPr lang="en-US" dirty="0"/>
+              <a:t>Each x has its own slope parameter. </a:t>
+            </a:r>
+          </a:p>
+          <a:p>
+            <a:pPr lvl="1"/>
+            <a:r>
+              <a:rPr lang="en-US" dirty="0"/>
+              <a:t>Slope along that dimension </a:t>
+            </a:r>
+            <a:r>
+              <a:rPr lang="en-US"/>
+              <a:t>indicates weighting of x. </a:t>
+            </a:r>
+            <a:endParaRPr lang="en-US" dirty="0"/>
+          </a:p>
+          <a:p>
+            <a:r>
+              <a:rPr lang="en-US" dirty="0"/>
+              <a:t>Direct calculation of LLS becomes less practical. </a:t>
+            </a:r>
+          </a:p>
+        </p:txBody>
+      </p:sp>
+      <p:pic>
+        <p:nvPicPr>
+          <p:cNvPr id="4" name="Picture 3" descr="Multiple Regression | CK-12 Foundation">
+            <a:extLst>
+              <a:ext uri="{FF2B5EF4-FFF2-40B4-BE49-F238E27FC236}">
+                <a16:creationId xmlns:a16="http://schemas.microsoft.com/office/drawing/2014/main" id="{1250862D-E7AD-2E60-DFC5-7F1806C60118}"/>
+              </a:ext>
+            </a:extLst>
+          </p:cNvPr>
+          <p:cNvPicPr>
+            <a:picLocks noChangeAspect="1"/>
+          </p:cNvPicPr>
+          <p:nvPr/>
+        </p:nvPicPr>
+        <p:blipFill>
+          <a:blip r:embed="rId2"/>
+          <a:stretch>
+            <a:fillRect/>
+          </a:stretch>
+        </p:blipFill>
+        <p:spPr>
+          <a:xfrm>
+            <a:off x="6253216" y="2015731"/>
+            <a:ext cx="5811559" cy="3450613"/>
+          </a:xfrm>
+          <a:prstGeom prst="rect">
+            <a:avLst/>
+          </a:prstGeom>
+        </p:spPr>
+      </p:pic>
+    </p:spTree>
+    <p:extLst>
+      <p:ext uri="{BB962C8B-B14F-4D97-AF65-F5344CB8AC3E}">
+        <p14:creationId xmlns:p14="http://schemas.microsoft.com/office/powerpoint/2010/main" val="1482325169"/>
+      </p:ext>
+    </p:extLst>
+  </p:cSld>
+  <p:clrMapOvr>
+    <a:masterClrMapping/>
+  </p:clrMapOvr>
+</p:sld>
+</file>
+
+<file path=ppt/slides/slide34.xml><?xml version="1.0" encoding="utf-8"?>
+<p:sld xmlns:a="http://schemas.openxmlformats.org/drawingml/2006/main" xmlns:r="http://schemas.openxmlformats.org/officeDocument/2006/relationships" xmlns:p="http://schemas.openxmlformats.org/presentationml/2006/main">
+  <p:cSld>
+    <p:spTree>
+      <p:nvGrpSpPr>
+        <p:cNvPr id="1" name=""/>
+        <p:cNvGrpSpPr/>
+        <p:nvPr/>
+      </p:nvGrpSpPr>
+      <p:grpSpPr>
+        <a:xfrm>
+          <a:off x="0" y="0"/>
+          <a:ext cx="0" cy="0"/>
+          <a:chOff x="0" y="0"/>
+          <a:chExt cx="0" cy="0"/>
+        </a:xfrm>
+      </p:grpSpPr>
+      <p:sp>
+        <p:nvSpPr>
+          <p:cNvPr id="2" name="Title 1">
+            <a:extLst>
+              <a:ext uri="{FF2B5EF4-FFF2-40B4-BE49-F238E27FC236}">
                 <a16:creationId xmlns:a16="http://schemas.microsoft.com/office/drawing/2014/main" id="{D488AB2B-8325-23DD-372E-361893A4DCC3}"/>
               </a:ext>
             </a:extLst>
@@ -9922,7 +10077,7 @@
 </p:sld>
 </file>
 
-<file path=ppt/slides/slide34.xml><?xml version="1.0" encoding="utf-8"?>
+<file path=ppt/slides/slide35.xml><?xml version="1.0" encoding="utf-8"?>
 <p:sld xmlns:a="http://schemas.openxmlformats.org/drawingml/2006/main" xmlns:r="http://schemas.openxmlformats.org/officeDocument/2006/relationships" xmlns:p="http://schemas.openxmlformats.org/presentationml/2006/main" show="0">
   <p:cSld>
     <p:spTree>
@@ -10067,7 +10222,7 @@
 </p:sld>
 </file>
 
-<file path=ppt/slides/slide35.xml><?xml version="1.0" encoding="utf-8"?>
+<file path=ppt/slides/slide36.xml><?xml version="1.0" encoding="utf-8"?>
 <p:sld xmlns:a="http://schemas.openxmlformats.org/drawingml/2006/main" xmlns:r="http://schemas.openxmlformats.org/officeDocument/2006/relationships" xmlns:p="http://schemas.openxmlformats.org/presentationml/2006/main">
   <p:cSld>
     <p:spTree>
@@ -10147,7 +10302,7 @@
 </p:sld>
 </file>
 
-<file path=ppt/slides/slide36.xml><?xml version="1.0" encoding="utf-8"?>
+<file path=ppt/slides/slide37.xml><?xml version="1.0" encoding="utf-8"?>
 <p:sld xmlns:a="http://schemas.openxmlformats.org/drawingml/2006/main" xmlns:r="http://schemas.openxmlformats.org/officeDocument/2006/relationships" xmlns:p="http://schemas.openxmlformats.org/presentationml/2006/main">
   <p:cSld>
     <p:spTree>
@@ -10394,6 +10549,45 @@
           </a:p>
         </p:txBody>
       </p:sp>
+      <p:sp>
+        <p:nvSpPr>
+          <p:cNvPr id="6" name="Content Placeholder 5">
+            <a:extLst>
+              <a:ext uri="{FF2B5EF4-FFF2-40B4-BE49-F238E27FC236}">
+                <a16:creationId xmlns:a16="http://schemas.microsoft.com/office/drawing/2014/main" id="{586AF4DA-20D8-2F9C-0408-DF2032048DD7}"/>
+              </a:ext>
+            </a:extLst>
+          </p:cNvPr>
+          <p:cNvSpPr>
+            <a:spLocks noGrp="1"/>
+          </p:cNvSpPr>
+          <p:nvPr>
+            <p:ph idx="1"/>
+          </p:nvPr>
+        </p:nvSpPr>
+        <p:spPr>
+          <a:xfrm>
+            <a:off x="5522976" y="2015732"/>
+            <a:ext cx="5531878" cy="3450613"/>
+          </a:xfrm>
+        </p:spPr>
+        <p:txBody>
+          <a:bodyPr/>
+          <a:lstStyle/>
+          <a:p>
+            <a:r>
+              <a:rPr lang="en-US" dirty="0"/>
+              <a:t>Where does the line go?</a:t>
+            </a:r>
+          </a:p>
+          <a:p>
+            <a:r>
+              <a:rPr lang="en-US" dirty="0"/>
+              <a:t>What does it represent? </a:t>
+            </a:r>
+          </a:p>
+        </p:txBody>
+      </p:sp>
     </p:spTree>
     <p:extLst>
       <p:ext uri="{BB962C8B-B14F-4D97-AF65-F5344CB8AC3E}">
@@ -10771,6 +10965,30 @@
 <file path=ppt/slides/slide7.xml><?xml version="1.0" encoding="utf-8"?>
 <p:sld xmlns:a="http://schemas.openxmlformats.org/drawingml/2006/main" xmlns:r="http://schemas.openxmlformats.org/officeDocument/2006/relationships" xmlns:p="http://schemas.openxmlformats.org/presentationml/2006/main">
   <p:cSld>
+    <p:bg>
+      <p:bgPr>
+        <a:gradFill rotWithShape="1">
+          <a:gsLst>
+            <a:gs pos="0">
+              <a:schemeClr val="bg2">
+                <a:tint val="94000"/>
+                <a:satMod val="80000"/>
+                <a:lumMod val="106000"/>
+              </a:schemeClr>
+            </a:gs>
+            <a:gs pos="100000">
+              <a:schemeClr val="bg2">
+                <a:shade val="80000"/>
+              </a:schemeClr>
+            </a:gs>
+          </a:gsLst>
+          <a:path path="circle">
+            <a:fillToRect l="43000" r="43000" b="100000"/>
+          </a:path>
+        </a:gradFill>
+        <a:effectLst/>
+      </p:bgPr>
+    </p:bg>
     <p:spTree>
       <p:nvGrpSpPr>
         <p:cNvPr id="1" name="Shape 62"/>
@@ -10785,146 +11003,327 @@
           <a:chExt cx="0" cy="0"/>
         </a:xfrm>
       </p:grpSpPr>
-      <p:sp>
-        <p:nvSpPr>
-          <p:cNvPr id="64" name="Google Shape;64;p18"/>
-          <p:cNvSpPr txBox="1">
-            <a:spLocks noGrp="1"/>
-          </p:cNvSpPr>
-          <p:nvPr>
-            <p:ph type="title"/>
-          </p:nvPr>
-        </p:nvSpPr>
-        <p:spPr>
+      <p:sp useBgFill="1">
+        <p:nvSpPr>
+          <p:cNvPr id="71" name="Rectangle 70">
+            <a:extLst>
+              <a:ext uri="{FF2B5EF4-FFF2-40B4-BE49-F238E27FC236}">
+                <a16:creationId xmlns:a16="http://schemas.microsoft.com/office/drawing/2014/main" id="{35C3D674-3D59-4E93-80CA-0C0A9095E816}"/>
+              </a:ext>
+              <a:ext uri="{C183D7F6-B498-43B3-948B-1728B52AA6E4}">
+                <adec:decorative xmlns:adec="http://schemas.microsoft.com/office/drawing/2017/decorative" val="1"/>
+              </a:ext>
+            </a:extLst>
+          </p:cNvPr>
+          <p:cNvSpPr>
+            <a:spLocks noGrp="1" noRot="1" noChangeAspect="1" noMove="1" noResize="1" noEditPoints="1" noAdjustHandles="1" noChangeArrowheads="1" noChangeShapeType="1" noTextEdit="1"/>
+          </p:cNvSpPr>
+          <p:nvPr>
+            <p:extLst>
+              <p:ext uri="{386F3935-93C4-4BCD-93E2-E3B085C9AB24}">
+                <p16:designElem xmlns:p16="http://schemas.microsoft.com/office/powerpoint/2015/main" val="1"/>
+              </p:ext>
+            </p:extLst>
+          </p:nvPr>
+        </p:nvSpPr>
+        <p:spPr>
+          <a:xfrm>
+            <a:off x="2" y="0"/>
+            <a:ext cx="12191695" cy="6858000"/>
+          </a:xfrm>
           <a:prstGeom prst="rect">
             <a:avLst/>
           </a:prstGeom>
-        </p:spPr>
-        <p:txBody>
-          <a:bodyPr spcFirstLastPara="1" vert="horz" wrap="square" lIns="91425" tIns="91425" rIns="91425" bIns="91425" rtlCol="0" anchor="b" anchorCtr="0">
-            <a:noAutofit/>
-          </a:bodyPr>
-          <a:lstStyle/>
-          <a:p>
-            <a:r>
-              <a:rPr lang="en">
-                <a:solidFill>
-                  <a:schemeClr val="accent1"/>
-                </a:solidFill>
-              </a:rPr>
-              <a:t>Poverty vs. HS graduate rate</a:t>
-            </a:r>
-            <a:endParaRPr baseline="30000">
-              <a:solidFill>
-                <a:schemeClr val="accent1"/>
-              </a:solidFill>
-            </a:endParaRPr>
-          </a:p>
-        </p:txBody>
-      </p:sp>
-      <p:sp>
-        <p:nvSpPr>
-          <p:cNvPr id="65" name="Google Shape;65;p18"/>
+          <a:ln>
+            <a:noFill/>
+          </a:ln>
+        </p:spPr>
+        <p:style>
+          <a:lnRef idx="2">
+            <a:schemeClr val="accent1">
+              <a:shade val="50000"/>
+            </a:schemeClr>
+          </a:lnRef>
+          <a:fillRef idx="1">
+            <a:schemeClr val="accent1"/>
+          </a:fillRef>
+          <a:effectRef idx="0">
+            <a:schemeClr val="accent1"/>
+          </a:effectRef>
+          <a:fontRef idx="minor">
+            <a:schemeClr val="lt1"/>
+          </a:fontRef>
+        </p:style>
+        <p:txBody>
+          <a:bodyPr rtlCol="0" anchor="ctr"/>
+          <a:lstStyle/>
+          <a:p>
+            <a:pPr algn="ctr"/>
+            <a:endParaRPr lang="en-US"/>
+          </a:p>
+        </p:txBody>
+      </p:sp>
+      <p:cxnSp>
+        <p:nvCxnSpPr>
+          <p:cNvPr id="73" name="Straight Connector 72">
+            <a:extLst>
+              <a:ext uri="{FF2B5EF4-FFF2-40B4-BE49-F238E27FC236}">
+                <a16:creationId xmlns:a16="http://schemas.microsoft.com/office/drawing/2014/main" id="{C884B8F8-FDC9-498B-9960-5D7260AFCB03}"/>
+              </a:ext>
+              <a:ext uri="{C183D7F6-B498-43B3-948B-1728B52AA6E4}">
+                <adec:decorative xmlns:adec="http://schemas.microsoft.com/office/drawing/2017/decorative" val="1"/>
+              </a:ext>
+            </a:extLst>
+          </p:cNvPr>
+          <p:cNvCxnSpPr>
+            <a:cxnSpLocks noGrp="1" noRot="1" noChangeAspect="1" noMove="1" noResize="1" noEditPoints="1" noAdjustHandles="1" noChangeArrowheads="1" noChangeShapeType="1"/>
+          </p:cNvCxnSpPr>
+          <p:nvPr>
+            <p:extLst>
+              <p:ext uri="{386F3935-93C4-4BCD-93E2-E3B085C9AB24}">
+                <p16:designElem xmlns:p16="http://schemas.microsoft.com/office/powerpoint/2015/main" val="1"/>
+              </p:ext>
+            </p:extLst>
+          </p:nvPr>
+        </p:nvCxnSpPr>
+        <p:spPr>
+          <a:xfrm>
+            <a:off x="1453896" y="1847088"/>
+            <a:ext cx="4177373" cy="0"/>
+          </a:xfrm>
+          <a:prstGeom prst="line">
+            <a:avLst/>
+          </a:prstGeom>
+          <a:ln w="31750"/>
+        </p:spPr>
+        <p:style>
+          <a:lnRef idx="3">
+            <a:schemeClr val="accent1"/>
+          </a:lnRef>
+          <a:fillRef idx="0">
+            <a:schemeClr val="accent1"/>
+          </a:fillRef>
+          <a:effectRef idx="2">
+            <a:schemeClr val="accent1"/>
+          </a:effectRef>
+          <a:fontRef idx="minor">
+            <a:schemeClr val="tx1"/>
+          </a:fontRef>
+        </p:style>
+      </p:cxnSp>
+      <p:sp>
+        <p:nvSpPr>
+          <p:cNvPr id="64" name="Google Shape;64;p18"/>
           <p:cNvSpPr txBox="1">
             <a:spLocks noGrp="1"/>
           </p:cNvSpPr>
           <p:nvPr>
-            <p:ph idx="1"/>
-          </p:nvPr>
-        </p:nvSpPr>
-        <p:spPr>
-          <a:xfrm>
-            <a:off x="1451579" y="1853754"/>
-            <a:ext cx="5289859" cy="4199727"/>
+            <p:ph type="title"/>
+          </p:nvPr>
+        </p:nvSpPr>
+        <p:spPr>
+          <a:xfrm>
+            <a:off x="1451580" y="804520"/>
+            <a:ext cx="4176511" cy="1049235"/>
           </a:xfrm>
           <a:prstGeom prst="rect">
             <a:avLst/>
           </a:prstGeom>
         </p:spPr>
         <p:txBody>
-          <a:bodyPr spcFirstLastPara="1" vert="horz" wrap="square" lIns="91425" tIns="91425" rIns="91425" bIns="91425" rtlCol="0" anchor="t" anchorCtr="0">
-            <a:noAutofit/>
+          <a:bodyPr spcFirstLastPara="1" vert="horz" lIns="91425" tIns="91425" rIns="91425" bIns="91425" rtlCol="0" anchorCtr="0">
+            <a:normAutofit/>
+          </a:bodyPr>
+          <a:lstStyle/>
+          <a:p>
+            <a:r>
+              <a:rPr lang="en-CA" sz="3000"/>
+              <a:t>Poverty vs. HS graduate rate</a:t>
+            </a:r>
+            <a:endParaRPr lang="en-CA" sz="3000" baseline="30000"/>
+          </a:p>
+        </p:txBody>
+      </p:sp>
+      <p:sp>
+        <p:nvSpPr>
+          <p:cNvPr id="75" name="Rectangle 74">
+            <a:extLst>
+              <a:ext uri="{FF2B5EF4-FFF2-40B4-BE49-F238E27FC236}">
+                <a16:creationId xmlns:a16="http://schemas.microsoft.com/office/drawing/2014/main" id="{EF2A81E1-BCBE-426B-8C09-33274E69409D}"/>
+              </a:ext>
+              <a:ext uri="{C183D7F6-B498-43B3-948B-1728B52AA6E4}">
+                <adec:decorative xmlns:adec="http://schemas.microsoft.com/office/drawing/2017/decorative" val="1"/>
+              </a:ext>
+            </a:extLst>
+          </p:cNvPr>
+          <p:cNvSpPr>
+            <a:spLocks noGrp="1" noRot="1" noChangeAspect="1" noMove="1" noResize="1" noEditPoints="1" noAdjustHandles="1" noChangeArrowheads="1" noChangeShapeType="1" noTextEdit="1"/>
+          </p:cNvSpPr>
+          <p:nvPr>
+            <p:extLst>
+              <p:ext uri="{386F3935-93C4-4BCD-93E2-E3B085C9AB24}">
+                <p16:designElem xmlns:p16="http://schemas.microsoft.com/office/powerpoint/2015/main" val="1"/>
+              </p:ext>
+            </p:extLst>
+          </p:nvPr>
+        </p:nvSpPr>
+        <p:spPr>
+          <a:xfrm>
+            <a:off x="0" y="2019476"/>
+            <a:ext cx="12192000" cy="4105941"/>
+          </a:xfrm>
+          <a:prstGeom prst="rect">
+            <a:avLst/>
+          </a:prstGeom>
+          <a:gradFill flip="none" rotWithShape="1">
+            <a:gsLst>
+              <a:gs pos="0">
+                <a:schemeClr val="bg2">
+                  <a:alpha val="0"/>
+                </a:schemeClr>
+              </a:gs>
+              <a:gs pos="100000">
+                <a:schemeClr val="bg2"/>
+              </a:gs>
+            </a:gsLst>
+            <a:lin ang="5400000" scaled="0"/>
+            <a:tileRect/>
+          </a:gradFill>
+          <a:ln>
+            <a:noFill/>
+          </a:ln>
+        </p:spPr>
+        <p:style>
+          <a:lnRef idx="2">
+            <a:schemeClr val="accent1">
+              <a:shade val="50000"/>
+            </a:schemeClr>
+          </a:lnRef>
+          <a:fillRef idx="1">
+            <a:schemeClr val="accent1"/>
+          </a:fillRef>
+          <a:effectRef idx="0">
+            <a:schemeClr val="accent1"/>
+          </a:effectRef>
+          <a:fontRef idx="minor">
+            <a:schemeClr val="lt1"/>
+          </a:fontRef>
+        </p:style>
+        <p:txBody>
+          <a:bodyPr rtlCol="0" anchor="ctr"/>
+          <a:lstStyle/>
+          <a:p>
+            <a:pPr lvl="0" algn="ctr"/>
+            <a:endParaRPr lang="en-US"/>
+          </a:p>
+        </p:txBody>
+      </p:sp>
+      <p:sp>
+        <p:nvSpPr>
+          <p:cNvPr id="65" name="Google Shape;65;p18"/>
+          <p:cNvSpPr txBox="1">
+            <a:spLocks noGrp="1"/>
+          </p:cNvSpPr>
+          <p:nvPr>
+            <p:ph idx="1"/>
+          </p:nvPr>
+        </p:nvSpPr>
+        <p:spPr>
+          <a:xfrm>
+            <a:off x="268224" y="2015732"/>
+            <a:ext cx="5825883" cy="4037738"/>
+          </a:xfrm>
+          <a:prstGeom prst="rect">
+            <a:avLst/>
+          </a:prstGeom>
+        </p:spPr>
+        <p:txBody>
+          <a:bodyPr spcFirstLastPara="1" vert="horz" lIns="91425" tIns="91425" rIns="91425" bIns="91425" rtlCol="0" anchorCtr="0">
+            <a:normAutofit/>
           </a:bodyPr>
           <a:lstStyle/>
           <a:p>
             <a:pPr>
               <a:lnSpc>
-                <a:spcPct val="115000"/>
+                <a:spcPct val="110000"/>
               </a:lnSpc>
               <a:spcBef>
                 <a:spcPts val="0"/>
               </a:spcBef>
+              <a:spcAft>
+                <a:spcPts val="600"/>
+              </a:spcAft>
             </a:pPr>
             <a:r>
-              <a:rPr lang="en" sz="2200" dirty="0"/>
+              <a:rPr lang="en-CA" dirty="0"/>
               <a:t>The </a:t>
             </a:r>
             <a:r>
-              <a:rPr lang="en" sz="2200" i="1" dirty="0">
-                <a:solidFill>
-                  <a:schemeClr val="accent1"/>
-                </a:solidFill>
-              </a:rPr>
-              <a:t>scatterplot</a:t>
-            </a:r>
-            <a:r>
-              <a:rPr lang="en" sz="2200" i="1" dirty="0"/>
-              <a:t> </a:t>
-            </a:r>
-            <a:r>
-              <a:rPr lang="en" sz="2200" dirty="0"/>
+              <a:rPr lang="en-CA" i="1" dirty="0"/>
+              <a:t>scatterplot </a:t>
+            </a:r>
+            <a:r>
+              <a:rPr lang="en-CA" dirty="0"/>
               <a:t>below shows the relationship between HS graduate rate in all 50 US states and DC and the percent of residents who live below the poverty line</a:t>
             </a:r>
             <a:br>
-              <a:rPr lang="en" sz="2200" dirty="0"/>
+              <a:rPr lang="en-CA" dirty="0"/>
             </a:br>
             <a:r>
-              <a:rPr lang="en" sz="2200" dirty="0"/>
+              <a:rPr lang="en-CA" dirty="0"/>
               <a:t>(income below $23,050 for a family of 4 in 2012).</a:t>
             </a:r>
           </a:p>
           <a:p>
             <a:pPr>
               <a:lnSpc>
-                <a:spcPct val="115000"/>
+                <a:spcPct val="110000"/>
               </a:lnSpc>
               <a:spcBef>
                 <a:spcPts val="0"/>
               </a:spcBef>
+              <a:spcAft>
+                <a:spcPts val="600"/>
+              </a:spcAft>
             </a:pPr>
             <a:r>
-              <a:rPr lang="en" sz="2200" dirty="0"/>
+              <a:rPr lang="en-CA" dirty="0"/>
               <a:t>We have 1 input (x) – HS grad. </a:t>
             </a:r>
           </a:p>
           <a:p>
             <a:pPr>
               <a:lnSpc>
-                <a:spcPct val="115000"/>
+                <a:spcPct val="110000"/>
               </a:lnSpc>
               <a:spcBef>
                 <a:spcPts val="0"/>
               </a:spcBef>
+              <a:spcAft>
+                <a:spcPts val="600"/>
+              </a:spcAft>
             </a:pPr>
             <a:r>
-              <a:rPr lang="en" sz="2200" dirty="0"/>
+              <a:rPr lang="en-CA" dirty="0"/>
               <a:t>We have 1 output (y) - % in poverty. </a:t>
             </a:r>
           </a:p>
           <a:p>
             <a:pPr>
               <a:lnSpc>
-                <a:spcPct val="115000"/>
+                <a:spcPct val="110000"/>
               </a:lnSpc>
               <a:spcBef>
                 <a:spcPts val="0"/>
               </a:spcBef>
+              <a:spcAft>
+                <a:spcPts val="600"/>
+              </a:spcAft>
             </a:pPr>
             <a:r>
-              <a:rPr lang="en" sz="2200" dirty="0"/>
+              <a:rPr lang="en-CA" dirty="0"/>
               <a:t>This real relationship is complex, this model is a simplified version. </a:t>
             </a:r>
-            <a:endParaRPr sz="2200" dirty="0"/>
           </a:p>
         </p:txBody>
       </p:sp>
@@ -10935,27 +11334,120 @@
           <p:nvPr/>
         </p:nvPicPr>
         <p:blipFill>
-          <a:blip r:embed="rId3">
-            <a:alphaModFix/>
-          </a:blip>
+          <a:blip r:embed="rId3"/>
           <a:stretch>
             <a:fillRect/>
           </a:stretch>
         </p:blipFill>
         <p:spPr>
           <a:xfrm>
-            <a:off x="6741438" y="1957820"/>
-            <a:ext cx="4857750" cy="3714750"/>
+            <a:off x="6094411" y="1239324"/>
+            <a:ext cx="4960442" cy="3793279"/>
           </a:xfrm>
           <a:prstGeom prst="rect">
             <a:avLst/>
           </a:prstGeom>
           <a:noFill/>
-          <a:ln>
-            <a:noFill/>
+        </p:spPr>
+      </p:pic>
+      <p:pic>
+        <p:nvPicPr>
+          <p:cNvPr id="77" name="Picture 76">
+            <a:extLst>
+              <a:ext uri="{FF2B5EF4-FFF2-40B4-BE49-F238E27FC236}">
+                <a16:creationId xmlns:a16="http://schemas.microsoft.com/office/drawing/2014/main" id="{39D1DDD4-5BB3-45BA-B9B3-06B62299AD79}"/>
+              </a:ext>
+              <a:ext uri="{C183D7F6-B498-43B3-948B-1728B52AA6E4}">
+                <adec:decorative xmlns:adec="http://schemas.microsoft.com/office/drawing/2017/decorative" val="1"/>
+              </a:ext>
+            </a:extLst>
+          </p:cNvPr>
+          <p:cNvPicPr>
+            <a:picLocks noGrp="1" noRot="1" noChangeAspect="1" noMove="1" noResize="1" noEditPoints="1" noAdjustHandles="1" noChangeArrowheads="1" noChangeShapeType="1" noCrop="1"/>
+          </p:cNvPicPr>
+          <p:nvPr>
+            <p:extLst>
+              <p:ext uri="{386F3935-93C4-4BCD-93E2-E3B085C9AB24}">
+                <p16:designElem xmlns:p16="http://schemas.microsoft.com/office/powerpoint/2015/main" val="1"/>
+              </p:ext>
+            </p:extLst>
+          </p:nvPr>
+        </p:nvPicPr>
+        <p:blipFill rotWithShape="1">
+          <a:blip r:embed="rId4">
+            <a:extLst>
+              <a:ext uri="{28A0092B-C50C-407E-A947-70E740481C1C}">
+                <a14:useLocalDpi xmlns:a14="http://schemas.microsoft.com/office/drawing/2010/main" val="0"/>
+              </a:ext>
+            </a:extLst>
+          </a:blip>
+          <a:srcRect t="1538" b="-1538"/>
+          <a:stretch/>
+        </p:blipFill>
+        <p:spPr bwMode="black">
+          <a:xfrm>
+            <a:off x="0" y="6126480"/>
+            <a:ext cx="12192000" cy="742950"/>
+          </a:xfrm>
+          <a:prstGeom prst="rect">
+            <a:avLst/>
+          </a:prstGeom>
+        </p:spPr>
+      </p:pic>
+      <p:cxnSp>
+        <p:nvCxnSpPr>
+          <p:cNvPr id="79" name="Straight Connector 78">
+            <a:extLst>
+              <a:ext uri="{FF2B5EF4-FFF2-40B4-BE49-F238E27FC236}">
+                <a16:creationId xmlns:a16="http://schemas.microsoft.com/office/drawing/2014/main" id="{A24DAE64-2302-42EA-8239-F2F0775CA5AD}"/>
+              </a:ext>
+              <a:ext uri="{C183D7F6-B498-43B3-948B-1728B52AA6E4}">
+                <adec:decorative xmlns:adec="http://schemas.microsoft.com/office/drawing/2017/decorative" val="1"/>
+              </a:ext>
+            </a:extLst>
+          </p:cNvPr>
+          <p:cNvCxnSpPr>
+            <a:cxnSpLocks noGrp="1" noRot="1" noChangeAspect="1" noMove="1" noResize="1" noEditPoints="1" noAdjustHandles="1" noChangeArrowheads="1" noChangeShapeType="1"/>
+          </p:cNvCxnSpPr>
+          <p:nvPr>
+            <p:extLst>
+              <p:ext uri="{386F3935-93C4-4BCD-93E2-E3B085C9AB24}">
+                <p16:designElem xmlns:p16="http://schemas.microsoft.com/office/powerpoint/2015/main" val="1"/>
+              </p:ext>
+            </p:extLst>
+          </p:nvPr>
+        </p:nvCxnSpPr>
+        <p:spPr>
+          <a:xfrm>
+            <a:off x="0" y="6128413"/>
+            <a:ext cx="12192000" cy="0"/>
+          </a:xfrm>
+          <a:prstGeom prst="line">
+            <a:avLst/>
+          </a:prstGeom>
+          <a:ln w="12700">
+            <a:solidFill>
+              <a:srgbClr val="000001">
+                <a:alpha val="20000"/>
+              </a:srgbClr>
+            </a:solidFill>
           </a:ln>
         </p:spPr>
-      </p:pic>
+        <p:style>
+          <a:lnRef idx="1">
+            <a:schemeClr val="accent1"/>
+          </a:lnRef>
+          <a:fillRef idx="0">
+            <a:schemeClr val="accent1"/>
+          </a:fillRef>
+          <a:effectRef idx="0">
+            <a:schemeClr val="accent1"/>
+          </a:effectRef>
+          <a:fontRef idx="minor">
+            <a:schemeClr val="tx1"/>
+          </a:fontRef>
+        </p:style>
+      </p:cxnSp>
     </p:spTree>
   </p:cSld>
   <p:clrMapOvr>
@@ -10967,6 +11459,30 @@
 <file path=ppt/slides/slide8.xml><?xml version="1.0" encoding="utf-8"?>
 <p:sld xmlns:a="http://schemas.openxmlformats.org/drawingml/2006/main" xmlns:r="http://schemas.openxmlformats.org/officeDocument/2006/relationships" xmlns:p="http://schemas.openxmlformats.org/presentationml/2006/main">
   <p:cSld>
+    <p:bg>
+      <p:bgPr>
+        <a:gradFill rotWithShape="1">
+          <a:gsLst>
+            <a:gs pos="0">
+              <a:schemeClr val="bg2">
+                <a:tint val="94000"/>
+                <a:satMod val="80000"/>
+                <a:lumMod val="106000"/>
+              </a:schemeClr>
+            </a:gs>
+            <a:gs pos="100000">
+              <a:schemeClr val="bg2">
+                <a:shade val="80000"/>
+              </a:schemeClr>
+            </a:gs>
+          </a:gsLst>
+          <a:path path="circle">
+            <a:fillToRect l="43000" r="43000" b="100000"/>
+          </a:path>
+        </a:gradFill>
+        <a:effectLst/>
+      </p:bgPr>
+    </p:bg>
     <p:spTree>
       <p:nvGrpSpPr>
         <p:cNvPr id="1" name="Shape 102"/>
@@ -10992,29 +11508,25 @@
           </p:nvPr>
         </p:nvSpPr>
         <p:spPr>
+          <a:xfrm>
+            <a:off x="1451579" y="804519"/>
+            <a:ext cx="9603275" cy="1049235"/>
+          </a:xfrm>
           <a:prstGeom prst="rect">
             <a:avLst/>
           </a:prstGeom>
         </p:spPr>
         <p:txBody>
-          <a:bodyPr spcFirstLastPara="1" vert="horz" wrap="square" lIns="91425" tIns="91425" rIns="91425" bIns="91425" rtlCol="0" anchor="b" anchorCtr="0">
-            <a:noAutofit/>
+          <a:bodyPr spcFirstLastPara="1" vert="horz" lIns="91425" tIns="91425" rIns="91425" bIns="91425" rtlCol="0" anchorCtr="0">
+            <a:normAutofit/>
           </a:bodyPr>
           <a:lstStyle/>
           <a:p>
             <a:r>
-              <a:rPr lang="en">
-                <a:solidFill>
-                  <a:schemeClr val="accent1"/>
-                </a:solidFill>
-              </a:rPr>
+              <a:rPr lang="en-CA"/>
               <a:t>Poverty vs. HS graduate rate</a:t>
             </a:r>
-            <a:endParaRPr baseline="30000">
-              <a:solidFill>
-                <a:schemeClr val="accent1"/>
-              </a:solidFill>
-            </a:endParaRPr>
+            <a:endParaRPr lang="en-CA" baseline="30000"/>
           </a:p>
         </p:txBody>
       </p:sp>
@@ -11030,23 +11542,20 @@
         </p:nvSpPr>
         <p:spPr>
           <a:xfrm>
-            <a:off x="6528054" y="2015732"/>
-            <a:ext cx="4526800" cy="3450613"/>
+            <a:off x="1451579" y="2015734"/>
+            <a:ext cx="4162555" cy="3450613"/>
           </a:xfrm>
           <a:prstGeom prst="rect">
             <a:avLst/>
           </a:prstGeom>
         </p:spPr>
         <p:txBody>
-          <a:bodyPr spcFirstLastPara="1" vert="horz" wrap="square" lIns="91425" tIns="91425" rIns="91425" bIns="91425" rtlCol="0" anchor="t" anchorCtr="0">
-            <a:noAutofit/>
+          <a:bodyPr spcFirstLastPara="1" vert="horz" lIns="91425" tIns="91425" rIns="91425" bIns="91425" rtlCol="0" anchorCtr="0">
+            <a:normAutofit/>
           </a:bodyPr>
           <a:lstStyle/>
           <a:p>
             <a:pPr marL="0" indent="0">
-              <a:lnSpc>
-                <a:spcPct val="115000"/>
-              </a:lnSpc>
               <a:spcBef>
                 <a:spcPts val="0"/>
               </a:spcBef>
@@ -11057,24 +11566,12 @@
               <a:buNone/>
             </a:pPr>
             <a:r>
-              <a:rPr lang="en" sz="2200" dirty="0">
-                <a:solidFill>
-                  <a:schemeClr val="accent1"/>
-                </a:solidFill>
-              </a:rPr>
+              <a:rPr lang="en-CA"/>
               <a:t>Response variable? (Y, output)</a:t>
             </a:r>
-            <a:endParaRPr sz="2200" dirty="0">
-              <a:solidFill>
-                <a:schemeClr val="accent1"/>
-              </a:solidFill>
-            </a:endParaRPr>
           </a:p>
           <a:p>
             <a:pPr marL="0" indent="0">
-              <a:lnSpc>
-                <a:spcPct val="115000"/>
-              </a:lnSpc>
               <a:spcBef>
                 <a:spcPts val="0"/>
               </a:spcBef>
@@ -11085,20 +11582,16 @@
               <a:buNone/>
             </a:pPr>
             <a:r>
-              <a:rPr lang="en" sz="2200" dirty="0"/>
+              <a:rPr lang="en-CA"/>
               <a:t> </a:t>
             </a:r>
             <a:r>
-              <a:rPr lang="en" sz="2200" i="1" dirty="0"/>
+              <a:rPr lang="en-CA" i="1"/>
               <a:t>% in poverty</a:t>
             </a:r>
-            <a:endParaRPr sz="2200" i="1" dirty="0"/>
           </a:p>
           <a:p>
             <a:pPr marL="0" indent="0">
-              <a:lnSpc>
-                <a:spcPct val="115000"/>
-              </a:lnSpc>
               <a:spcBef>
                 <a:spcPts val="1000"/>
               </a:spcBef>
@@ -11109,24 +11602,12 @@
               <a:buNone/>
             </a:pPr>
             <a:r>
-              <a:rPr lang="en" sz="2200" dirty="0">
-                <a:solidFill>
-                  <a:schemeClr val="accent1"/>
-                </a:solidFill>
-              </a:rPr>
+              <a:rPr lang="en-CA"/>
               <a:t>Explanatory variable? (X, input)</a:t>
             </a:r>
-            <a:endParaRPr sz="2200" dirty="0">
-              <a:solidFill>
-                <a:schemeClr val="accent1"/>
-              </a:solidFill>
-            </a:endParaRPr>
           </a:p>
           <a:p>
             <a:pPr marL="0" indent="0">
-              <a:lnSpc>
-                <a:spcPct val="115000"/>
-              </a:lnSpc>
               <a:spcBef>
                 <a:spcPts val="0"/>
               </a:spcBef>
@@ -11137,20 +11618,16 @@
               <a:buNone/>
             </a:pPr>
             <a:r>
-              <a:rPr lang="en" sz="2200" dirty="0"/>
+              <a:rPr lang="en-CA"/>
               <a:t> </a:t>
             </a:r>
             <a:r>
-              <a:rPr lang="en" sz="2200" i="1" dirty="0"/>
+              <a:rPr lang="en-CA" i="1"/>
               <a:t>% HS grad</a:t>
             </a:r>
-            <a:endParaRPr sz="2200" i="1" dirty="0"/>
           </a:p>
           <a:p>
             <a:pPr marL="0" indent="0">
-              <a:lnSpc>
-                <a:spcPct val="115000"/>
-              </a:lnSpc>
               <a:spcBef>
                 <a:spcPts val="1000"/>
               </a:spcBef>
@@ -11161,41 +11638,28 @@
               <a:buNone/>
             </a:pPr>
             <a:r>
-              <a:rPr lang="en" sz="2200" dirty="0">
-                <a:solidFill>
-                  <a:schemeClr val="accent1"/>
-                </a:solidFill>
-              </a:rPr>
+              <a:rPr lang="en-CA"/>
               <a:t>Relationship?</a:t>
             </a:r>
-            <a:endParaRPr sz="2200" dirty="0">
-              <a:solidFill>
-                <a:schemeClr val="accent1"/>
-              </a:solidFill>
-            </a:endParaRPr>
           </a:p>
           <a:p>
             <a:pPr marL="0" indent="0">
-              <a:lnSpc>
-                <a:spcPct val="115000"/>
-              </a:lnSpc>
               <a:spcBef>
                 <a:spcPts val="0"/>
               </a:spcBef>
               <a:buNone/>
             </a:pPr>
             <a:r>
-              <a:rPr lang="en" sz="2200" i="1" dirty="0"/>
+              <a:rPr lang="en-CA" i="1"/>
               <a:t> linear, negative,</a:t>
             </a:r>
             <a:br>
-              <a:rPr lang="en" sz="2200" i="1" dirty="0"/>
+              <a:rPr lang="en-CA" i="1"/>
             </a:br>
             <a:r>
-              <a:rPr lang="en" sz="2200" i="1" dirty="0"/>
+              <a:rPr lang="en-CA" i="1"/>
               <a:t> moderately strong</a:t>
             </a:r>
-            <a:endParaRPr sz="2200" i="1" dirty="0"/>
           </a:p>
         </p:txBody>
       </p:sp>
@@ -11206,25 +11670,20 @@
           <p:nvPr/>
         </p:nvPicPr>
         <p:blipFill>
-          <a:blip r:embed="rId3">
-            <a:alphaModFix/>
-          </a:blip>
+          <a:blip r:embed="rId3"/>
           <a:stretch>
             <a:fillRect/>
           </a:stretch>
         </p:blipFill>
         <p:spPr>
           <a:xfrm>
-            <a:off x="1670304" y="2015732"/>
-            <a:ext cx="4857750" cy="3714750"/>
+            <a:off x="6318462" y="2015734"/>
+            <a:ext cx="4512340" cy="3450613"/>
           </a:xfrm>
           <a:prstGeom prst="rect">
             <a:avLst/>
           </a:prstGeom>
           <a:noFill/>
-          <a:ln>
-            <a:noFill/>
-          </a:ln>
         </p:spPr>
       </p:pic>
     </p:spTree>
